--- a/processed/mvccc/157_記念主名.pptx
+++ b/processed/mvccc/157_記念主名.pptx
@@ -14,6 +14,9 @@
     <p:sldId id="259" r:id="rId11"/>
     <p:sldId id="260" r:id="rId12"/>
     <p:sldId id="261" r:id="rId13"/>
+    <p:sldId id="262" r:id="rId14"/>
+    <p:sldId id="263" r:id="rId15"/>
+    <p:sldId id="264" r:id="rId16"/>
   </p:sldIdLst>
   <p:sldSz cx="12192000" cy="6858000"/>
   <p:notesSz cx="6858000" cy="9144000"/>
@@ -626,8 +629,8 @@
         </p:nvSpPr>
         <p:spPr>
           <a:xfrm>
-            <a:off x="406400" y="589901"/>
-            <a:ext cx="11379200" cy="5678198"/>
+            <a:off x="406400" y="914400"/>
+            <a:ext cx="11379200" cy="5353699"/>
           </a:xfrm>
           <a:prstGeom prst="rect">
             <a:avLst/>
@@ -637,7 +640,7 @@
           <a:bodyPr/>
           <a:lstStyle>
             <a:lvl1pPr algn="ctr">
-              <a:defRPr sz="7200"/>
+              <a:defRPr sz="7600"/>
             </a:lvl1pPr>
           </a:lstStyle>
           <a:p>
@@ -839,7 +842,7 @@
           <a:bodyPr/>
           <a:lstStyle>
             <a:lvl1pPr>
-              <a:defRPr sz="3800">
+              <a:defRPr sz="4800">
                 <a:latin typeface="Helvetica Neue"/>
                 <a:ea typeface="Helvetica Neue"/>
                 <a:cs typeface="Helvetica Neue"/>
@@ -1007,120 +1010,128 @@
 </file>
 
 <file path=ppt/slideLayouts/slideLayout5.xml><?xml version="1.0" encoding="utf-8"?>
-<p:sldLayout xmlns:a="http://schemas.openxmlformats.org/drawingml/2006/main" xmlns:p="http://schemas.openxmlformats.org/presentationml/2006/main" type="tx" showMasterSp="1" showMasterPhAnim="1">
-  <p:cSld name="teaching">
-    <p:spTree>
-      <p:nvGrpSpPr>
-        <p:cNvPr id="1" name=""/>
-        <p:cNvGrpSpPr/>
-        <p:nvPr/>
-      </p:nvGrpSpPr>
-      <p:grpSpPr>
-        <a:xfrm>
-          <a:off x="0" y="0"/>
-          <a:ext cx="0" cy="0"/>
-          <a:chOff x="0" y="0"/>
-          <a:chExt cx="0" cy="0"/>
-        </a:xfrm>
-      </p:grpSpPr>
-      <p:sp>
-        <p:nvSpPr>
-          <p:cNvPr id="55" name="信息"/>
-          <p:cNvSpPr txBox="1"/>
-          <p:nvPr>
-            <p:ph type="title" hasCustomPrompt="1"/>
-          </p:nvPr>
-        </p:nvSpPr>
-        <p:spPr>
-          <a:prstGeom prst="rect">
-            <a:avLst/>
-          </a:prstGeom>
-        </p:spPr>
-        <p:txBody>
-          <a:bodyPr/>
-          <a:lstStyle>
-            <a:lvl1pPr>
-              <a:defRPr b="1" sz="5600">
-                <a:latin typeface="Helvetica Neue"/>
-                <a:ea typeface="Helvetica Neue"/>
-                <a:cs typeface="Helvetica Neue"/>
-                <a:sym typeface="Helvetica Neue"/>
-              </a:defRPr>
-            </a:lvl1pPr>
-          </a:lstStyle>
-          <a:p>
-            <a:pPr/>
-            <a:r>
-              <a:t>信息</a:t>
-            </a:r>
-          </a:p>
-        </p:txBody>
-      </p:sp>
-      <p:sp>
-        <p:nvSpPr>
-          <p:cNvPr id="56" name="Body Level One…"/>
-          <p:cNvSpPr txBox="1"/>
-          <p:nvPr>
-            <p:ph type="body" idx="21" hasCustomPrompt="1"/>
-          </p:nvPr>
-        </p:nvSpPr>
-        <p:spPr>
-          <a:prstGeom prst="rect">
-            <a:avLst/>
-          </a:prstGeom>
-        </p:spPr>
-        <p:txBody>
-          <a:bodyPr/>
-          <a:lstStyle>
-            <a:lvl1pPr algn="ctr">
-              <a:defRPr sz="3600">
-                <a:latin typeface="Helvetica Neue"/>
-                <a:ea typeface="Helvetica Neue"/>
-                <a:cs typeface="Helvetica Neue"/>
-                <a:sym typeface="Helvetica Neue"/>
-              </a:defRPr>
-              <a:lnSpc>
-                <a:spcPct val="120000"/>
-              </a:lnSpc>
-            </a:lvl1pPr>
-          </a:lstStyle>
-          <a:p>
-            <a:pPr/>
-            <a:r>
-              <a:t>神愛世人</a:t>
-            </a:r>
-          </a:p>
-        </p:txBody>
-      </p:sp>
-      <p:sp>
-        <p:nvSpPr>
-          <p:cNvPr id="57" name="Slide Number"/>
-          <p:cNvSpPr txBox="1"/>
-          <p:nvPr>
-            <p:ph type="sldNum" sz="quarter" idx="2"/>
-          </p:nvPr>
-        </p:nvSpPr>
-        <p:spPr>
-          <a:prstGeom prst="rect">
-            <a:avLst/>
-          </a:prstGeom>
-        </p:spPr>
-        <p:txBody>
-          <a:bodyPr/>
-          <a:lstStyle/>
-          <a:p>
-            <a:pPr/>
-            <a:fld id="{86CB4B4D-7CA3-9044-876B-883B54F8677D}" type="slidenum"/>
-          </a:p>
-        </p:txBody>
-      </p:sp>
-    </p:spTree>
-  </p:cSld>
-  <p:clrMapOvr>
-    <a:masterClrMapping/>
-  </p:clrMapOvr>
-  <p:transition spd="med" advClick="1"/>
-</p:sldLayout>
+<ns0:sldLayout xmlns:ns0="http://schemas.openxmlformats.org/presentationml/2006/main" xmlns:ns1="http://schemas.openxmlformats.org/drawingml/2006/main" type="tx" showMasterSp="1" showMasterPhAnim="1">
+  <ns0:cSld name="teaching">
+    <ns0:spTree>
+      <ns0:nvGrpSpPr>
+        <ns0:cNvPr id="1" name=""/>
+        <ns0:cNvGrpSpPr/>
+        <ns0:nvPr/>
+      </ns0:nvGrpSpPr>
+      <ns0:grpSpPr>
+        <ns1:xfrm>
+          <ns1:off x="0" y="0"/>
+          <ns1:ext cx="0" cy="0"/>
+          <ns1:chOff x="0" y="0"/>
+          <ns1:chExt cx="0" cy="0"/>
+        </ns1:xfrm>
+      </ns0:grpSpPr>
+      <ns0:sp>
+        <ns0:nvSpPr>
+          <ns0:cNvPr id="55" name="信息"/>
+          <ns0:cNvSpPr txBox="1"/>
+          <ns0:nvPr>
+            <ns0:ph type="title" hasCustomPrompt="1"/>
+          </ns0:nvPr>
+        </ns0:nvSpPr>
+        <ns0:spPr>
+          <ns1:prstGeom prst="rect">
+            <ns1:avLst/>
+          </ns1:prstGeom>
+          <ns1:xfrm>
+            <ns1:off x="548640" y="2377440"/>
+            <ns1:ext cx="11094720" cy="1097280"/>
+          </ns1:xfrm>
+        </ns0:spPr>
+        <ns0:txBody>
+          <ns1:bodyPr/>
+          <ns1:lstStyle>
+            <ns1:lvl1pPr>
+              <ns1:defRPr b="1" sz="5200">
+                <ns1:latin typeface="Helvetica Neue"/>
+                <ns1:ea typeface="Helvetica Neue"/>
+                <ns1:cs typeface="Helvetica Neue"/>
+                <ns1:sym typeface="Helvetica Neue"/>
+              </ns1:defRPr>
+            </ns1:lvl1pPr>
+          </ns1:lstStyle>
+          <ns1:p>
+            <ns1:pPr/>
+            <ns1:r>
+              <ns1:t>信息</ns1:t>
+            </ns1:r>
+          </ns1:p>
+        </ns0:txBody>
+      </ns0:sp>
+      <ns0:sp>
+        <ns0:nvSpPr>
+          <ns0:cNvPr id="56" name="Body Level One…"/>
+          <ns0:cNvSpPr txBox="1"/>
+          <ns0:nvPr>
+            <ns0:ph type="body" idx="21" hasCustomPrompt="1"/>
+          </ns0:nvPr>
+        </ns0:nvSpPr>
+        <ns0:spPr>
+          <ns1:prstGeom prst="rect">
+            <ns1:avLst/>
+          </ns1:prstGeom>
+          <ns1:xfrm>
+            <ns1:off x="548640" y="4023360"/>
+            <ns1:ext cx="11094720" cy="822960"/>
+          </ns1:xfrm>
+        </ns0:spPr>
+        <ns0:txBody>
+          <ns1:bodyPr/>
+          <ns1:lstStyle>
+            <ns1:lvl1pPr algn="ctr">
+              <ns1:defRPr sz="4000">
+                <ns1:latin typeface="Helvetica Neue"/>
+                <ns1:ea typeface="Helvetica Neue"/>
+                <ns1:cs typeface="Helvetica Neue"/>
+                <ns1:sym typeface="Helvetica Neue"/>
+              </ns1:defRPr>
+              <ns1:lnSpc>
+                <ns1:spcPct val="120000"/>
+              </ns1:lnSpc>
+            </ns1:lvl1pPr>
+          </ns1:lstStyle>
+          <ns1:p>
+            <ns1:pPr/>
+            <ns1:r>
+              <ns1:t>神愛世人</ns1:t>
+            </ns1:r>
+          </ns1:p>
+        </ns0:txBody>
+      </ns0:sp>
+      <ns0:sp>
+        <ns0:nvSpPr>
+          <ns0:cNvPr id="57" name="Slide Number"/>
+          <ns0:cNvSpPr txBox="1"/>
+          <ns0:nvPr>
+            <ns0:ph type="sldNum" sz="quarter" idx="2"/>
+          </ns0:nvPr>
+        </ns0:nvSpPr>
+        <ns0:spPr>
+          <ns1:prstGeom prst="rect">
+            <ns1:avLst/>
+          </ns1:prstGeom>
+        </ns0:spPr>
+        <ns0:txBody>
+          <ns1:bodyPr/>
+          <ns1:lstStyle/>
+          <ns1:p>
+            <ns1:pPr/>
+            <ns1:fld id="{86CB4B4D-7CA3-9044-876B-883B54F8677D}" type="slidenum"/>
+          </ns1:p>
+        </ns0:txBody>
+      </ns0:sp>
+    </ns0:spTree>
+  </ns0:cSld>
+  <ns0:clrMapOvr>
+    <ns1:masterClrMapping/>
+  </ns0:clrMapOvr>
+  <ns0:transition spd="med" advClick="1"/>
+</ns0:sldLayout>
 </file>
 
 <file path=ppt/slideLayouts/slideLayout6.xml><?xml version="1.0" encoding="utf-8"?>
@@ -1331,8 +1342,8 @@
         </p:nvSpPr>
         <p:spPr>
           <a:xfrm>
-            <a:off x="1158086" y="2743200"/>
-            <a:ext cx="9875521" cy="1371600"/>
+            <a:off x="1158086" y="1800000"/>
+            <a:ext cx="9875521" cy="3200000"/>
           </a:xfrm>
           <a:prstGeom prst="rect">
             <a:avLst/>
@@ -1340,7 +1351,24 @@
         </p:spPr>
         <p:txBody>
           <a:bodyPr/>
-          <a:lstStyle/>
+          <a:lstStyle>
+            <a:lvl1pPr>
+              <a:defRPr sz="4000">
+                <a:latin typeface="Helvetica Neue"/>
+                <a:ea typeface="Helvetica Neue"/>
+                <a:cs typeface="Helvetica Neue"/>
+                <a:sym typeface="Helvetica Neue"/>
+              </a:defRPr>
+            </a:lvl1pPr>
+            <a:lvl2pPr>
+              <a:defRPr b="1" sz="8000">
+                <a:latin typeface="Helvetica Neue"/>
+                <a:ea typeface="Helvetica Neue"/>
+                <a:cs typeface="Helvetica Neue"/>
+                <a:sym typeface="Helvetica Neue"/>
+              </a:defRPr>
+            </a:lvl2pPr>
+          </a:lstStyle>
           <a:p>
             <a:pPr/>
             <a:r>
@@ -1389,9 +1417,12 @@
   <p:cSld>
     <p:bg>
       <p:bgPr>
-        <a:solidFill>
-          <a:srgbClr val="0B0F14"/>
-        </a:solidFill>
+        <a:blipFill dpi="0" rotWithShape="1">
+          <a:blip xmlns:r="http://schemas.openxmlformats.org/officeDocument/2006/relationships" r:embed="rId13"/>
+          <a:stretch>
+            <a:fillRect/>
+          </a:stretch>
+        </a:blipFill>
       </p:bgPr>
     </p:bg>
     <p:spTree>
@@ -1408,1783 +1439,6 @@
           <a:chExt cx="0" cy="0"/>
         </a:xfrm>
       </p:grpSpPr>
-      <p:grpSp>
-        <p:nvGrpSpPr>
-          <p:cNvPr id="9" name="Group 4"/>
-          <p:cNvGrpSpPr/>
-          <p:nvPr/>
-        </p:nvGrpSpPr>
-        <p:grpSpPr>
-          <a:xfrm>
-            <a:off x="3657437" y="2128837"/>
-            <a:ext cx="8523459" cy="4721233"/>
-            <a:chOff x="-2" y="-2"/>
-            <a:chExt cx="8523458" cy="4721232"/>
-          </a:xfrm>
-        </p:grpSpPr>
-        <p:grpSp>
-          <p:nvGrpSpPr>
-            <p:cNvPr id="7" name="Group 5"/>
-            <p:cNvGrpSpPr/>
-            <p:nvPr/>
-          </p:nvGrpSpPr>
-          <p:grpSpPr>
-            <a:xfrm>
-              <a:off x="-3" y="1411286"/>
-              <a:ext cx="8523459" cy="3309944"/>
-              <a:chOff x="-1" y="-1"/>
-              <a:chExt cx="8523457" cy="3309943"/>
-            </a:xfrm>
-          </p:grpSpPr>
-          <p:sp>
-            <p:nvSpPr>
-              <p:cNvPr id="2" name="Freeform 6"/>
-              <p:cNvSpPr/>
-              <p:nvPr/>
-            </p:nvSpPr>
-            <p:spPr>
-              <a:xfrm>
-                <a:off x="-2" y="657225"/>
-                <a:ext cx="6099979" cy="2652718"/>
-              </a:xfrm>
-              <a:custGeom>
-                <a:avLst/>
-                <a:gdLst/>
-                <a:ahLst/>
-                <a:cxnLst>
-                  <a:cxn ang="0">
-                    <a:pos x="wd2" y="hd2"/>
-                  </a:cxn>
-                  <a:cxn ang="5400000">
-                    <a:pos x="wd2" y="hd2"/>
-                  </a:cxn>
-                  <a:cxn ang="10800000">
-                    <a:pos x="wd2" y="hd2"/>
-                  </a:cxn>
-                  <a:cxn ang="16200000">
-                    <a:pos x="wd2" y="hd2"/>
-                  </a:cxn>
-                </a:cxnLst>
-                <a:rect l="0" t="0" r="r" b="b"/>
-                <a:pathLst>
-                  <a:path w="21600" h="21600" fill="norm" stroke="1" extrusionOk="0">
-                    <a:moveTo>
-                      <a:pt x="20783" y="7032"/>
-                    </a:moveTo>
-                    <a:lnTo>
-                      <a:pt x="20536" y="6825"/>
-                    </a:lnTo>
-                    <a:lnTo>
-                      <a:pt x="20176" y="6541"/>
-                    </a:lnTo>
-                    <a:lnTo>
-                      <a:pt x="19726" y="6256"/>
-                    </a:lnTo>
-                    <a:lnTo>
-                      <a:pt x="19194" y="5907"/>
-                    </a:lnTo>
-                    <a:lnTo>
-                      <a:pt x="18587" y="5481"/>
-                    </a:lnTo>
-                    <a:lnTo>
-                      <a:pt x="17898" y="5132"/>
-                    </a:lnTo>
-                    <a:lnTo>
-                      <a:pt x="16511" y="4434"/>
-                    </a:lnTo>
-                    <a:lnTo>
-                      <a:pt x="15574" y="4007"/>
-                    </a:lnTo>
-                    <a:lnTo>
-                      <a:pt x="14765" y="3581"/>
-                    </a:lnTo>
-                    <a:lnTo>
-                      <a:pt x="14075" y="3167"/>
-                    </a:lnTo>
-                    <a:lnTo>
-                      <a:pt x="13543" y="2740"/>
-                    </a:lnTo>
-                    <a:lnTo>
-                      <a:pt x="13056" y="2314"/>
-                    </a:lnTo>
-                    <a:lnTo>
-                      <a:pt x="12689" y="1965"/>
-                    </a:lnTo>
-                    <a:lnTo>
-                      <a:pt x="12404" y="1616"/>
-                    </a:lnTo>
-                    <a:lnTo>
-                      <a:pt x="12202" y="1331"/>
-                    </a:lnTo>
-                    <a:lnTo>
-                      <a:pt x="12037" y="1047"/>
-                    </a:lnTo>
-                    <a:lnTo>
-                      <a:pt x="11917" y="776"/>
-                    </a:lnTo>
-                    <a:lnTo>
-                      <a:pt x="11879" y="556"/>
-                    </a:lnTo>
-                    <a:lnTo>
-                      <a:pt x="11834" y="349"/>
-                    </a:lnTo>
-                    <a:lnTo>
-                      <a:pt x="11879" y="65"/>
-                    </a:lnTo>
-                    <a:lnTo>
-                      <a:pt x="11879" y="0"/>
-                    </a:lnTo>
-                    <a:lnTo>
-                      <a:pt x="11752" y="349"/>
-                    </a:lnTo>
-                    <a:lnTo>
-                      <a:pt x="11669" y="633"/>
-                    </a:lnTo>
-                    <a:lnTo>
-                      <a:pt x="11669" y="982"/>
-                    </a:lnTo>
-                    <a:lnTo>
-                      <a:pt x="11752" y="1267"/>
-                    </a:lnTo>
-                    <a:lnTo>
-                      <a:pt x="11917" y="1551"/>
-                    </a:lnTo>
-                    <a:lnTo>
-                      <a:pt x="12119" y="1823"/>
-                    </a:lnTo>
-                    <a:lnTo>
-                      <a:pt x="12366" y="2107"/>
-                    </a:lnTo>
-                    <a:lnTo>
-                      <a:pt x="12651" y="2391"/>
-                    </a:lnTo>
-                    <a:lnTo>
-                      <a:pt x="13018" y="2676"/>
-                    </a:lnTo>
-                    <a:lnTo>
-                      <a:pt x="13423" y="2947"/>
-                    </a:lnTo>
-                    <a:lnTo>
-                      <a:pt x="14278" y="3451"/>
-                    </a:lnTo>
-                    <a:lnTo>
-                      <a:pt x="15289" y="4007"/>
-                    </a:lnTo>
-                    <a:lnTo>
-                      <a:pt x="16354" y="4498"/>
-                    </a:lnTo>
-                    <a:lnTo>
-                      <a:pt x="17126" y="4925"/>
-                    </a:lnTo>
-                    <a:lnTo>
-                      <a:pt x="17853" y="5274"/>
-                    </a:lnTo>
-                    <a:lnTo>
-                      <a:pt x="18467" y="5623"/>
-                    </a:lnTo>
-                    <a:lnTo>
-                      <a:pt x="19037" y="5972"/>
-                    </a:lnTo>
-                    <a:lnTo>
-                      <a:pt x="19524" y="6256"/>
-                    </a:lnTo>
-                    <a:lnTo>
-                      <a:pt x="19929" y="6541"/>
-                    </a:lnTo>
-                    <a:lnTo>
-                      <a:pt x="20296" y="6825"/>
-                    </a:lnTo>
-                    <a:lnTo>
-                      <a:pt x="20536" y="7032"/>
-                    </a:lnTo>
-                    <a:lnTo>
-                      <a:pt x="20746" y="7239"/>
-                    </a:lnTo>
-                    <a:lnTo>
-                      <a:pt x="20866" y="7459"/>
-                    </a:lnTo>
-                    <a:lnTo>
-                      <a:pt x="20948" y="7665"/>
-                    </a:lnTo>
-                    <a:lnTo>
-                      <a:pt x="20985" y="7950"/>
-                    </a:lnTo>
-                    <a:lnTo>
-                      <a:pt x="20948" y="8299"/>
-                    </a:lnTo>
-                    <a:lnTo>
-                      <a:pt x="20866" y="8583"/>
-                    </a:lnTo>
-                    <a:lnTo>
-                      <a:pt x="20701" y="8932"/>
-                    </a:lnTo>
-                    <a:lnTo>
-                      <a:pt x="20461" y="9217"/>
-                    </a:lnTo>
-                    <a:lnTo>
-                      <a:pt x="20176" y="9501"/>
-                    </a:lnTo>
-                    <a:lnTo>
-                      <a:pt x="19809" y="9772"/>
-                    </a:lnTo>
-                    <a:lnTo>
-                      <a:pt x="19404" y="10057"/>
-                    </a:lnTo>
-                    <a:lnTo>
-                      <a:pt x="18954" y="10341"/>
-                    </a:lnTo>
-                    <a:lnTo>
-                      <a:pt x="18422" y="10625"/>
-                    </a:lnTo>
-                    <a:lnTo>
-                      <a:pt x="17853" y="10897"/>
-                    </a:lnTo>
-                    <a:lnTo>
-                      <a:pt x="17246" y="11181"/>
-                    </a:lnTo>
-                    <a:lnTo>
-                      <a:pt x="16593" y="11466"/>
-                    </a:lnTo>
-                    <a:lnTo>
-                      <a:pt x="15214" y="12022"/>
-                    </a:lnTo>
-                    <a:lnTo>
-                      <a:pt x="13663" y="12655"/>
-                    </a:lnTo>
-                    <a:lnTo>
-                      <a:pt x="12037" y="13366"/>
-                    </a:lnTo>
-                    <a:lnTo>
-                      <a:pt x="10328" y="14141"/>
-                    </a:lnTo>
-                    <a:lnTo>
-                      <a:pt x="8582" y="15046"/>
-                    </a:lnTo>
-                    <a:lnTo>
-                      <a:pt x="6835" y="16042"/>
-                    </a:lnTo>
-                    <a:lnTo>
-                      <a:pt x="5044" y="17166"/>
-                    </a:lnTo>
-                    <a:lnTo>
-                      <a:pt x="3298" y="18498"/>
-                    </a:lnTo>
-                    <a:lnTo>
-                      <a:pt x="1626" y="19971"/>
-                    </a:lnTo>
-                    <a:lnTo>
-                      <a:pt x="0" y="21600"/>
-                    </a:lnTo>
-                    <a:lnTo>
-                      <a:pt x="2646" y="21600"/>
-                    </a:lnTo>
-                    <a:lnTo>
-                      <a:pt x="4152" y="20256"/>
-                    </a:lnTo>
-                    <a:lnTo>
-                      <a:pt x="5651" y="18989"/>
-                    </a:lnTo>
-                    <a:lnTo>
-                      <a:pt x="7158" y="17942"/>
-                    </a:lnTo>
-                    <a:lnTo>
-                      <a:pt x="8582" y="16946"/>
-                    </a:lnTo>
-                    <a:lnTo>
-                      <a:pt x="10006" y="16042"/>
-                    </a:lnTo>
-                    <a:lnTo>
-                      <a:pt x="11385" y="15331"/>
-                    </a:lnTo>
-                    <a:lnTo>
-                      <a:pt x="12689" y="14633"/>
-                    </a:lnTo>
-                    <a:lnTo>
-                      <a:pt x="13948" y="13999"/>
-                    </a:lnTo>
-                    <a:lnTo>
-                      <a:pt x="15132" y="13508"/>
-                    </a:lnTo>
-                    <a:lnTo>
-                      <a:pt x="16226" y="13017"/>
-                    </a:lnTo>
-                    <a:lnTo>
-                      <a:pt x="17246" y="12590"/>
-                    </a:lnTo>
-                    <a:lnTo>
-                      <a:pt x="18182" y="12241"/>
-                    </a:lnTo>
-                    <a:lnTo>
-                      <a:pt x="18992" y="11815"/>
-                    </a:lnTo>
-                    <a:lnTo>
-                      <a:pt x="19681" y="11530"/>
-                    </a:lnTo>
-                    <a:lnTo>
-                      <a:pt x="20251" y="11181"/>
-                    </a:lnTo>
-                    <a:lnTo>
-                      <a:pt x="20701" y="10832"/>
-                    </a:lnTo>
-                    <a:lnTo>
-                      <a:pt x="20985" y="10548"/>
-                    </a:lnTo>
-                    <a:lnTo>
-                      <a:pt x="21188" y="10264"/>
-                    </a:lnTo>
-                    <a:lnTo>
-                      <a:pt x="21353" y="9915"/>
-                    </a:lnTo>
-                    <a:lnTo>
-                      <a:pt x="21473" y="9630"/>
-                    </a:lnTo>
-                    <a:lnTo>
-                      <a:pt x="21555" y="9359"/>
-                    </a:lnTo>
-                    <a:lnTo>
-                      <a:pt x="21600" y="9074"/>
-                    </a:lnTo>
-                    <a:lnTo>
-                      <a:pt x="21555" y="8506"/>
-                    </a:lnTo>
-                    <a:lnTo>
-                      <a:pt x="21390" y="8014"/>
-                    </a:lnTo>
-                    <a:lnTo>
-                      <a:pt x="21233" y="7601"/>
-                    </a:lnTo>
-                    <a:lnTo>
-                      <a:pt x="20985" y="7239"/>
-                    </a:lnTo>
-                    <a:lnTo>
-                      <a:pt x="20783" y="7032"/>
-                    </a:lnTo>
-                    <a:close/>
-                  </a:path>
-                </a:pathLst>
-              </a:custGeom>
-              <a:gradFill flip="none" rotWithShape="1">
-                <a:gsLst>
-                  <a:gs pos="0">
-                    <a:srgbClr val="0B0F14"/>
-                  </a:gs>
-                  <a:gs pos="100000">
-                    <a:srgbClr val="132033"/>
-                  </a:gs>
-                </a:gsLst>
-                <a:lin ang="0" scaled="0"/>
-              </a:gradFill>
-              <a:ln w="12700" cap="flat">
-                <a:noFill/>
-                <a:miter lim="400000"/>
-              </a:ln>
-              <a:effectLst/>
-            </p:spPr>
-            <p:txBody>
-              <a:bodyPr wrap="square" lIns="45718" tIns="45718" rIns="45718" bIns="45718" numCol="1" anchor="t">
-                <a:noAutofit/>
-              </a:bodyPr>
-              <a:lstStyle/>
-              <a:p>
-                <a:pPr>
-                  <a:defRPr>
-                    <a:solidFill>
-                      <a:srgbClr val="F8FAFC"/>
-                    </a:solidFill>
-                    <a:latin typeface="Garamond"/>
-                    <a:ea typeface="Garamond"/>
-                    <a:cs typeface="Garamond"/>
-                    <a:sym typeface="Garamond"/>
-                  </a:defRPr>
-                </a:pPr>
-              </a:p>
-            </p:txBody>
-          </p:sp>
-          <p:sp>
-            <p:nvSpPr>
-              <p:cNvPr id="3" name="Freeform 7"/>
-              <p:cNvSpPr/>
-              <p:nvPr/>
-            </p:nvSpPr>
-            <p:spPr>
-              <a:xfrm>
-                <a:off x="5168679" y="700087"/>
-                <a:ext cx="2664774" cy="1287467"/>
-              </a:xfrm>
-              <a:custGeom>
-                <a:avLst/>
-                <a:gdLst/>
-                <a:ahLst/>
-                <a:cxnLst>
-                  <a:cxn ang="0">
-                    <a:pos x="wd2" y="hd2"/>
-                  </a:cxn>
-                  <a:cxn ang="5400000">
-                    <a:pos x="wd2" y="hd2"/>
-                  </a:cxn>
-                  <a:cxn ang="10800000">
-                    <a:pos x="wd2" y="hd2"/>
-                  </a:cxn>
-                  <a:cxn ang="16200000">
-                    <a:pos x="wd2" y="hd2"/>
-                  </a:cxn>
-                </a:cxnLst>
-                <a:rect l="0" t="0" r="r" b="b"/>
-                <a:pathLst>
-                  <a:path w="21600" h="21600" fill="norm" stroke="1" extrusionOk="0">
-                    <a:moveTo>
-                      <a:pt x="21600" y="16380"/>
-                    </a:moveTo>
-                    <a:lnTo>
-                      <a:pt x="21411" y="15661"/>
-                    </a:lnTo>
-                    <a:lnTo>
-                      <a:pt x="21223" y="15075"/>
-                    </a:lnTo>
-                    <a:lnTo>
-                      <a:pt x="20862" y="14356"/>
-                    </a:lnTo>
-                    <a:lnTo>
-                      <a:pt x="20382" y="13770"/>
-                    </a:lnTo>
-                    <a:lnTo>
-                      <a:pt x="19267" y="12758"/>
-                    </a:lnTo>
-                    <a:lnTo>
-                      <a:pt x="17877" y="11745"/>
-                    </a:lnTo>
-                    <a:lnTo>
-                      <a:pt x="16196" y="10867"/>
-                    </a:lnTo>
-                    <a:lnTo>
-                      <a:pt x="14429" y="10147"/>
-                    </a:lnTo>
-                    <a:lnTo>
-                      <a:pt x="12473" y="9269"/>
-                    </a:lnTo>
-                    <a:lnTo>
-                      <a:pt x="8561" y="7830"/>
-                    </a:lnTo>
-                    <a:lnTo>
-                      <a:pt x="6708" y="6951"/>
-                    </a:lnTo>
-                    <a:lnTo>
-                      <a:pt x="4941" y="6099"/>
-                    </a:lnTo>
-                    <a:lnTo>
-                      <a:pt x="3346" y="5220"/>
-                    </a:lnTo>
-                    <a:lnTo>
-                      <a:pt x="2042" y="4048"/>
-                    </a:lnTo>
-                    <a:lnTo>
-                      <a:pt x="926" y="2903"/>
-                    </a:lnTo>
-                    <a:lnTo>
-                      <a:pt x="566" y="2317"/>
-                    </a:lnTo>
-                    <a:lnTo>
-                      <a:pt x="275" y="1598"/>
-                    </a:lnTo>
-                    <a:lnTo>
-                      <a:pt x="86" y="879"/>
-                    </a:lnTo>
-                    <a:lnTo>
-                      <a:pt x="0" y="0"/>
-                    </a:lnTo>
-                    <a:lnTo>
-                      <a:pt x="0" y="1012"/>
-                    </a:lnTo>
-                    <a:lnTo>
-                      <a:pt x="86" y="1598"/>
-                    </a:lnTo>
-                    <a:lnTo>
-                      <a:pt x="275" y="2317"/>
-                    </a:lnTo>
-                    <a:lnTo>
-                      <a:pt x="566" y="3036"/>
-                    </a:lnTo>
-                    <a:lnTo>
-                      <a:pt x="926" y="3782"/>
-                    </a:lnTo>
-                    <a:lnTo>
-                      <a:pt x="1493" y="4634"/>
-                    </a:lnTo>
-                    <a:lnTo>
-                      <a:pt x="2145" y="5513"/>
-                    </a:lnTo>
-                    <a:lnTo>
-                      <a:pt x="3071" y="6392"/>
-                    </a:lnTo>
-                    <a:lnTo>
-                      <a:pt x="4186" y="7404"/>
-                    </a:lnTo>
-                    <a:lnTo>
-                      <a:pt x="5593" y="8256"/>
-                    </a:lnTo>
-                    <a:lnTo>
-                      <a:pt x="7171" y="9269"/>
-                    </a:lnTo>
-                    <a:lnTo>
-                      <a:pt x="9024" y="10147"/>
-                    </a:lnTo>
-                    <a:lnTo>
-                      <a:pt x="11272" y="11026"/>
-                    </a:lnTo>
-                    <a:lnTo>
-                      <a:pt x="12850" y="11586"/>
-                    </a:lnTo>
-                    <a:lnTo>
-                      <a:pt x="14240" y="12331"/>
-                    </a:lnTo>
-                    <a:lnTo>
-                      <a:pt x="15458" y="13051"/>
-                    </a:lnTo>
-                    <a:lnTo>
-                      <a:pt x="16573" y="13636"/>
-                    </a:lnTo>
-                    <a:lnTo>
-                      <a:pt x="17414" y="14356"/>
-                    </a:lnTo>
-                    <a:lnTo>
-                      <a:pt x="18066" y="15075"/>
-                    </a:lnTo>
-                    <a:lnTo>
-                      <a:pt x="18529" y="15794"/>
-                    </a:lnTo>
-                    <a:lnTo>
-                      <a:pt x="18906" y="16513"/>
-                    </a:lnTo>
-                    <a:lnTo>
-                      <a:pt x="19078" y="17259"/>
-                    </a:lnTo>
-                    <a:lnTo>
-                      <a:pt x="19181" y="17978"/>
-                    </a:lnTo>
-                    <a:lnTo>
-                      <a:pt x="19078" y="18564"/>
-                    </a:lnTo>
-                    <a:lnTo>
-                      <a:pt x="18803" y="19283"/>
-                    </a:lnTo>
-                    <a:lnTo>
-                      <a:pt x="18529" y="19869"/>
-                    </a:lnTo>
-                    <a:lnTo>
-                      <a:pt x="18066" y="20428"/>
-                    </a:lnTo>
-                    <a:lnTo>
-                      <a:pt x="16762" y="21600"/>
-                    </a:lnTo>
-                    <a:lnTo>
-                      <a:pt x="17963" y="21014"/>
-                    </a:lnTo>
-                    <a:lnTo>
-                      <a:pt x="18992" y="20428"/>
-                    </a:lnTo>
-                    <a:lnTo>
-                      <a:pt x="19833" y="19869"/>
-                    </a:lnTo>
-                    <a:lnTo>
-                      <a:pt x="20571" y="19283"/>
-                    </a:lnTo>
-                    <a:lnTo>
-                      <a:pt x="21034" y="18697"/>
-                    </a:lnTo>
-                    <a:lnTo>
-                      <a:pt x="21411" y="17978"/>
-                    </a:lnTo>
-                    <a:lnTo>
-                      <a:pt x="21600" y="17259"/>
-                    </a:lnTo>
-                    <a:lnTo>
-                      <a:pt x="21600" y="16380"/>
-                    </a:lnTo>
-                    <a:close/>
-                  </a:path>
-                </a:pathLst>
-              </a:custGeom>
-              <a:gradFill flip="none" rotWithShape="1">
-                <a:gsLst>
-                  <a:gs pos="0">
-                    <a:srgbClr val="0B0F14"/>
-                  </a:gs>
-                  <a:gs pos="100000">
-                    <a:srgbClr val="132033"/>
-                  </a:gs>
-                </a:gsLst>
-                <a:lin ang="2700000" scaled="0"/>
-              </a:gradFill>
-              <a:ln w="12700" cap="flat">
-                <a:noFill/>
-                <a:miter lim="400000"/>
-              </a:ln>
-              <a:effectLst/>
-            </p:spPr>
-            <p:txBody>
-              <a:bodyPr wrap="square" lIns="45718" tIns="45718" rIns="45718" bIns="45718" numCol="1" anchor="t">
-                <a:noAutofit/>
-              </a:bodyPr>
-              <a:lstStyle/>
-              <a:p>
-                <a:pPr>
-                  <a:defRPr>
-                    <a:solidFill>
-                      <a:srgbClr val="F8FAFC"/>
-                    </a:solidFill>
-                    <a:latin typeface="Garamond"/>
-                    <a:ea typeface="Garamond"/>
-                    <a:cs typeface="Garamond"/>
-                    <a:sym typeface="Garamond"/>
-                  </a:defRPr>
-                </a:pPr>
-              </a:p>
-            </p:txBody>
-          </p:sp>
-          <p:sp>
-            <p:nvSpPr>
-              <p:cNvPr id="4" name="Freeform 8"/>
-              <p:cNvSpPr/>
-              <p:nvPr/>
-            </p:nvSpPr>
-            <p:spPr>
-              <a:xfrm>
-                <a:off x="2480627" y="1771651"/>
-                <a:ext cx="6030130" cy="1538292"/>
-              </a:xfrm>
-              <a:custGeom>
-                <a:avLst/>
-                <a:gdLst/>
-                <a:ahLst/>
-                <a:cxnLst>
-                  <a:cxn ang="0">
-                    <a:pos x="wd2" y="hd2"/>
-                  </a:cxn>
-                  <a:cxn ang="5400000">
-                    <a:pos x="wd2" y="hd2"/>
-                  </a:cxn>
-                  <a:cxn ang="10800000">
-                    <a:pos x="wd2" y="hd2"/>
-                  </a:cxn>
-                  <a:cxn ang="16200000">
-                    <a:pos x="wd2" y="hd2"/>
-                  </a:cxn>
-                </a:cxnLst>
-                <a:rect l="0" t="0" r="r" b="b"/>
-                <a:pathLst>
-                  <a:path w="21600" h="21600" fill="norm" stroke="1" extrusionOk="0">
-                    <a:moveTo>
-                      <a:pt x="698" y="21355"/>
-                    </a:moveTo>
-                    <a:lnTo>
-                      <a:pt x="0" y="21600"/>
-                    </a:lnTo>
-                    <a:lnTo>
-                      <a:pt x="2964" y="21600"/>
-                    </a:lnTo>
-                    <a:lnTo>
-                      <a:pt x="3290" y="21110"/>
-                    </a:lnTo>
-                    <a:lnTo>
-                      <a:pt x="3662" y="20374"/>
-                    </a:lnTo>
-                    <a:lnTo>
-                      <a:pt x="4200" y="19527"/>
-                    </a:lnTo>
-                    <a:lnTo>
-                      <a:pt x="4814" y="18680"/>
-                    </a:lnTo>
-                    <a:lnTo>
-                      <a:pt x="5512" y="17699"/>
-                    </a:lnTo>
-                    <a:lnTo>
-                      <a:pt x="6338" y="16607"/>
-                    </a:lnTo>
-                    <a:lnTo>
-                      <a:pt x="7286" y="15515"/>
-                    </a:lnTo>
-                    <a:lnTo>
-                      <a:pt x="8355" y="14311"/>
-                    </a:lnTo>
-                    <a:lnTo>
-                      <a:pt x="9545" y="12973"/>
-                    </a:lnTo>
-                    <a:lnTo>
-                      <a:pt x="10864" y="11636"/>
-                    </a:lnTo>
-                    <a:lnTo>
-                      <a:pt x="12305" y="10298"/>
-                    </a:lnTo>
-                    <a:lnTo>
-                      <a:pt x="13867" y="8983"/>
-                    </a:lnTo>
-                    <a:lnTo>
-                      <a:pt x="15595" y="7646"/>
-                    </a:lnTo>
-                    <a:lnTo>
-                      <a:pt x="17445" y="6308"/>
-                    </a:lnTo>
-                    <a:lnTo>
-                      <a:pt x="19462" y="4971"/>
-                    </a:lnTo>
-                    <a:lnTo>
-                      <a:pt x="21600" y="3633"/>
-                    </a:lnTo>
-                    <a:lnTo>
-                      <a:pt x="21600" y="0"/>
-                    </a:lnTo>
-                    <a:lnTo>
-                      <a:pt x="21357" y="357"/>
-                    </a:lnTo>
-                    <a:lnTo>
-                      <a:pt x="21024" y="736"/>
-                    </a:lnTo>
-                    <a:lnTo>
-                      <a:pt x="20614" y="1204"/>
-                    </a:lnTo>
-                    <a:lnTo>
-                      <a:pt x="20076" y="1694"/>
-                    </a:lnTo>
-                    <a:lnTo>
-                      <a:pt x="19500" y="2185"/>
-                    </a:lnTo>
-                    <a:lnTo>
-                      <a:pt x="18886" y="2675"/>
-                    </a:lnTo>
-                    <a:lnTo>
-                      <a:pt x="18188" y="3277"/>
-                    </a:lnTo>
-                    <a:lnTo>
-                      <a:pt x="17445" y="3767"/>
-                    </a:lnTo>
-                    <a:lnTo>
-                      <a:pt x="14322" y="6175"/>
-                    </a:lnTo>
-                    <a:lnTo>
-                      <a:pt x="12798" y="7267"/>
-                    </a:lnTo>
-                    <a:lnTo>
-                      <a:pt x="12055" y="7891"/>
-                    </a:lnTo>
-                    <a:lnTo>
-                      <a:pt x="11395" y="8493"/>
-                    </a:lnTo>
-                    <a:lnTo>
-                      <a:pt x="8393" y="11279"/>
-                    </a:lnTo>
-                    <a:lnTo>
-                      <a:pt x="6914" y="12862"/>
-                    </a:lnTo>
-                    <a:lnTo>
-                      <a:pt x="5512" y="14422"/>
-                    </a:lnTo>
-                    <a:lnTo>
-                      <a:pt x="4155" y="16005"/>
-                    </a:lnTo>
-                    <a:lnTo>
-                      <a:pt x="2881" y="17699"/>
-                    </a:lnTo>
-                    <a:lnTo>
-                      <a:pt x="1729" y="19527"/>
-                    </a:lnTo>
-                    <a:lnTo>
-                      <a:pt x="698" y="21355"/>
-                    </a:lnTo>
-                    <a:close/>
-                  </a:path>
-                </a:pathLst>
-              </a:custGeom>
-              <a:gradFill flip="none" rotWithShape="1">
-                <a:gsLst>
-                  <a:gs pos="0">
-                    <a:srgbClr val="111827"/>
-                  </a:gs>
-                  <a:gs pos="100000">
-                    <a:srgbClr val="0B0F14"/>
-                  </a:gs>
-                </a:gsLst>
-                <a:lin ang="5400000" scaled="0"/>
-              </a:gradFill>
-              <a:ln w="12700" cap="flat">
-                <a:noFill/>
-                <a:miter lim="400000"/>
-              </a:ln>
-              <a:effectLst/>
-            </p:spPr>
-            <p:txBody>
-              <a:bodyPr wrap="square" lIns="45718" tIns="45718" rIns="45718" bIns="45718" numCol="1" anchor="t">
-                <a:noAutofit/>
-              </a:bodyPr>
-              <a:lstStyle/>
-              <a:p>
-                <a:pPr>
-                  <a:defRPr>
-                    <a:solidFill>
-                      <a:srgbClr val="F8FAFC"/>
-                    </a:solidFill>
-                    <a:latin typeface="Garamond"/>
-                    <a:ea typeface="Garamond"/>
-                    <a:cs typeface="Garamond"/>
-                    <a:sym typeface="Garamond"/>
-                  </a:defRPr>
-                </a:pPr>
-              </a:p>
-            </p:txBody>
-          </p:sp>
-          <p:sp>
-            <p:nvSpPr>
-              <p:cNvPr id="5" name="Freeform 9"/>
-              <p:cNvSpPr/>
-              <p:nvPr/>
-            </p:nvSpPr>
-            <p:spPr>
-              <a:xfrm>
-                <a:off x="2158907" y="-2"/>
-                <a:ext cx="6364550" cy="3309945"/>
-              </a:xfrm>
-              <a:custGeom>
-                <a:avLst/>
-                <a:gdLst/>
-                <a:ahLst/>
-                <a:cxnLst>
-                  <a:cxn ang="0">
-                    <a:pos x="wd2" y="hd2"/>
-                  </a:cxn>
-                  <a:cxn ang="5400000">
-                    <a:pos x="wd2" y="hd2"/>
-                  </a:cxn>
-                  <a:cxn ang="10800000">
-                    <a:pos x="wd2" y="hd2"/>
-                  </a:cxn>
-                  <a:cxn ang="16200000">
-                    <a:pos x="wd2" y="hd2"/>
-                  </a:cxn>
-                </a:cxnLst>
-                <a:rect l="0" t="0" r="r" b="b"/>
-                <a:pathLst>
-                  <a:path w="21600" h="21600" fill="norm" stroke="1" extrusionOk="0">
-                    <a:moveTo>
-                      <a:pt x="10250" y="4569"/>
-                    </a:moveTo>
-                    <a:lnTo>
-                      <a:pt x="10294" y="4911"/>
-                    </a:lnTo>
-                    <a:lnTo>
-                      <a:pt x="10373" y="5190"/>
-                    </a:lnTo>
-                    <a:lnTo>
-                      <a:pt x="10488" y="5470"/>
-                    </a:lnTo>
-                    <a:lnTo>
-                      <a:pt x="10646" y="5698"/>
-                    </a:lnTo>
-                    <a:lnTo>
-                      <a:pt x="11069" y="6143"/>
-                    </a:lnTo>
-                    <a:lnTo>
-                      <a:pt x="11658" y="6599"/>
-                    </a:lnTo>
-                    <a:lnTo>
-                      <a:pt x="12319" y="6941"/>
-                    </a:lnTo>
-                    <a:lnTo>
-                      <a:pt x="13059" y="7273"/>
-                    </a:lnTo>
-                    <a:lnTo>
-                      <a:pt x="13842" y="7614"/>
-                    </a:lnTo>
-                    <a:lnTo>
-                      <a:pt x="15480" y="8174"/>
-                    </a:lnTo>
-                    <a:lnTo>
-                      <a:pt x="16299" y="8516"/>
-                    </a:lnTo>
-                    <a:lnTo>
-                      <a:pt x="17039" y="8795"/>
-                    </a:lnTo>
-                    <a:lnTo>
-                      <a:pt x="17700" y="9137"/>
-                    </a:lnTo>
-                    <a:lnTo>
-                      <a:pt x="18324" y="9531"/>
-                    </a:lnTo>
-                    <a:lnTo>
-                      <a:pt x="18791" y="9925"/>
-                    </a:lnTo>
-                    <a:lnTo>
-                      <a:pt x="18949" y="10153"/>
-                    </a:lnTo>
-                    <a:lnTo>
-                      <a:pt x="19100" y="10432"/>
-                    </a:lnTo>
-                    <a:lnTo>
-                      <a:pt x="19222" y="10660"/>
-                    </a:lnTo>
-                    <a:lnTo>
-                      <a:pt x="19258" y="10940"/>
-                    </a:lnTo>
-                    <a:lnTo>
-                      <a:pt x="19258" y="11220"/>
-                    </a:lnTo>
-                    <a:lnTo>
-                      <a:pt x="19222" y="11447"/>
-                    </a:lnTo>
-                    <a:lnTo>
-                      <a:pt x="19143" y="11675"/>
-                    </a:lnTo>
-                    <a:lnTo>
-                      <a:pt x="18985" y="11903"/>
-                    </a:lnTo>
-                    <a:lnTo>
-                      <a:pt x="18791" y="12121"/>
-                    </a:lnTo>
-                    <a:lnTo>
-                      <a:pt x="18554" y="12297"/>
-                    </a:lnTo>
-                    <a:lnTo>
-                      <a:pt x="18281" y="12515"/>
-                    </a:lnTo>
-                    <a:lnTo>
-                      <a:pt x="17972" y="12691"/>
-                    </a:lnTo>
-                    <a:lnTo>
-                      <a:pt x="17585" y="12856"/>
-                    </a:lnTo>
-                    <a:lnTo>
-                      <a:pt x="17154" y="13022"/>
-                    </a:lnTo>
-                    <a:lnTo>
-                      <a:pt x="16723" y="13198"/>
-                    </a:lnTo>
-                    <a:lnTo>
-                      <a:pt x="16220" y="13364"/>
-                    </a:lnTo>
-                    <a:lnTo>
-                      <a:pt x="15128" y="13758"/>
-                    </a:lnTo>
-                    <a:lnTo>
-                      <a:pt x="13878" y="14214"/>
-                    </a:lnTo>
-                    <a:lnTo>
-                      <a:pt x="12513" y="14721"/>
-                    </a:lnTo>
-                    <a:lnTo>
-                      <a:pt x="10998" y="15281"/>
-                    </a:lnTo>
-                    <a:lnTo>
-                      <a:pt x="9396" y="15954"/>
-                    </a:lnTo>
-                    <a:lnTo>
-                      <a:pt x="7679" y="16752"/>
-                    </a:lnTo>
-                    <a:lnTo>
-                      <a:pt x="5890" y="17705"/>
-                    </a:lnTo>
-                    <a:lnTo>
-                      <a:pt x="3980" y="18834"/>
-                    </a:lnTo>
-                    <a:lnTo>
-                      <a:pt x="2026" y="20129"/>
-                    </a:lnTo>
-                    <a:lnTo>
-                      <a:pt x="0" y="21600"/>
-                    </a:lnTo>
-                    <a:lnTo>
-                      <a:pt x="1092" y="21600"/>
-                    </a:lnTo>
-                    <a:lnTo>
-                      <a:pt x="1753" y="21486"/>
-                    </a:lnTo>
-                    <a:lnTo>
-                      <a:pt x="2773" y="20637"/>
-                    </a:lnTo>
-                    <a:lnTo>
-                      <a:pt x="3857" y="19787"/>
-                    </a:lnTo>
-                    <a:lnTo>
-                      <a:pt x="5028" y="19000"/>
-                    </a:lnTo>
-                    <a:lnTo>
-                      <a:pt x="6314" y="18264"/>
-                    </a:lnTo>
-                    <a:lnTo>
-                      <a:pt x="7643" y="17539"/>
-                    </a:lnTo>
-                    <a:lnTo>
-                      <a:pt x="9044" y="16803"/>
-                    </a:lnTo>
-                    <a:lnTo>
-                      <a:pt x="11931" y="15508"/>
-                    </a:lnTo>
-                    <a:lnTo>
-                      <a:pt x="12556" y="15229"/>
-                    </a:lnTo>
-                    <a:lnTo>
-                      <a:pt x="13253" y="14939"/>
-                    </a:lnTo>
-                    <a:lnTo>
-                      <a:pt x="14697" y="14431"/>
-                    </a:lnTo>
-                    <a:lnTo>
-                      <a:pt x="17656" y="13312"/>
-                    </a:lnTo>
-                    <a:lnTo>
-                      <a:pt x="18324" y="13084"/>
-                    </a:lnTo>
-                    <a:lnTo>
-                      <a:pt x="18985" y="12805"/>
-                    </a:lnTo>
-                    <a:lnTo>
-                      <a:pt x="19610" y="12577"/>
-                    </a:lnTo>
-                    <a:lnTo>
-                      <a:pt x="20156" y="12349"/>
-                    </a:lnTo>
-                    <a:lnTo>
-                      <a:pt x="20659" y="12121"/>
-                    </a:lnTo>
-                    <a:lnTo>
-                      <a:pt x="21054" y="11903"/>
-                    </a:lnTo>
-                    <a:lnTo>
-                      <a:pt x="21363" y="11727"/>
-                    </a:lnTo>
-                    <a:lnTo>
-                      <a:pt x="21600" y="11561"/>
-                    </a:lnTo>
-                    <a:lnTo>
-                      <a:pt x="21600" y="9023"/>
-                    </a:lnTo>
-                    <a:lnTo>
-                      <a:pt x="21126" y="8909"/>
-                    </a:lnTo>
-                    <a:lnTo>
-                      <a:pt x="20544" y="8744"/>
-                    </a:lnTo>
-                    <a:lnTo>
-                      <a:pt x="19919" y="8567"/>
-                    </a:lnTo>
-                    <a:lnTo>
-                      <a:pt x="19179" y="8350"/>
-                    </a:lnTo>
-                    <a:lnTo>
-                      <a:pt x="18439" y="8122"/>
-                    </a:lnTo>
-                    <a:lnTo>
-                      <a:pt x="17656" y="7842"/>
-                    </a:lnTo>
-                    <a:lnTo>
-                      <a:pt x="16098" y="7273"/>
-                    </a:lnTo>
-                    <a:lnTo>
-                      <a:pt x="15358" y="6941"/>
-                    </a:lnTo>
-                    <a:lnTo>
-                      <a:pt x="14697" y="6599"/>
-                    </a:lnTo>
-                    <a:lnTo>
-                      <a:pt x="14072" y="6257"/>
-                    </a:lnTo>
-                    <a:lnTo>
-                      <a:pt x="13526" y="5864"/>
-                    </a:lnTo>
-                    <a:lnTo>
-                      <a:pt x="13102" y="5532"/>
-                    </a:lnTo>
-                    <a:lnTo>
-                      <a:pt x="12786" y="5128"/>
-                    </a:lnTo>
-                    <a:lnTo>
-                      <a:pt x="12707" y="4911"/>
-                    </a:lnTo>
-                    <a:lnTo>
-                      <a:pt x="12628" y="4734"/>
-                    </a:lnTo>
-                    <a:lnTo>
-                      <a:pt x="12592" y="4517"/>
-                    </a:lnTo>
-                    <a:lnTo>
-                      <a:pt x="12628" y="4341"/>
-                    </a:lnTo>
-                    <a:lnTo>
-                      <a:pt x="12786" y="3947"/>
-                    </a:lnTo>
-                    <a:lnTo>
-                      <a:pt x="13023" y="3553"/>
-                    </a:lnTo>
-                    <a:lnTo>
-                      <a:pt x="13375" y="3274"/>
-                    </a:lnTo>
-                    <a:lnTo>
-                      <a:pt x="13799" y="2994"/>
-                    </a:lnTo>
-                    <a:lnTo>
-                      <a:pt x="14266" y="2766"/>
-                    </a:lnTo>
-                    <a:lnTo>
-                      <a:pt x="14812" y="2538"/>
-                    </a:lnTo>
-                    <a:lnTo>
-                      <a:pt x="16062" y="2207"/>
-                    </a:lnTo>
-                    <a:lnTo>
-                      <a:pt x="17462" y="1865"/>
-                    </a:lnTo>
-                    <a:lnTo>
-                      <a:pt x="18870" y="1637"/>
-                    </a:lnTo>
-                    <a:lnTo>
-                      <a:pt x="20307" y="1295"/>
-                    </a:lnTo>
-                    <a:lnTo>
-                      <a:pt x="20975" y="1129"/>
-                    </a:lnTo>
-                    <a:lnTo>
-                      <a:pt x="21600" y="901"/>
-                    </a:lnTo>
-                    <a:lnTo>
-                      <a:pt x="21600" y="0"/>
-                    </a:lnTo>
-                    <a:lnTo>
-                      <a:pt x="20896" y="228"/>
-                    </a:lnTo>
-                    <a:lnTo>
-                      <a:pt x="20077" y="456"/>
-                    </a:lnTo>
-                    <a:lnTo>
-                      <a:pt x="19222" y="684"/>
-                    </a:lnTo>
-                    <a:lnTo>
-                      <a:pt x="18324" y="849"/>
-                    </a:lnTo>
-                    <a:lnTo>
-                      <a:pt x="16414" y="1243"/>
-                    </a:lnTo>
-                    <a:lnTo>
-                      <a:pt x="15480" y="1409"/>
-                    </a:lnTo>
-                    <a:lnTo>
-                      <a:pt x="14582" y="1637"/>
-                    </a:lnTo>
-                    <a:lnTo>
-                      <a:pt x="13684" y="1803"/>
-                    </a:lnTo>
-                    <a:lnTo>
-                      <a:pt x="12865" y="2093"/>
-                    </a:lnTo>
-                    <a:lnTo>
-                      <a:pt x="12125" y="2372"/>
-                    </a:lnTo>
-                    <a:lnTo>
-                      <a:pt x="11500" y="2704"/>
-                    </a:lnTo>
-                    <a:lnTo>
-                      <a:pt x="10954" y="3108"/>
-                    </a:lnTo>
-                    <a:lnTo>
-                      <a:pt x="10567" y="3502"/>
-                    </a:lnTo>
-                    <a:lnTo>
-                      <a:pt x="10452" y="3719"/>
-                    </a:lnTo>
-                    <a:lnTo>
-                      <a:pt x="10329" y="4009"/>
-                    </a:lnTo>
-                    <a:lnTo>
-                      <a:pt x="10250" y="4289"/>
-                    </a:lnTo>
-                    <a:lnTo>
-                      <a:pt x="10250" y="4569"/>
-                    </a:lnTo>
-                    <a:close/>
-                  </a:path>
-                </a:pathLst>
-              </a:custGeom>
-              <a:solidFill>
-                <a:srgbClr val="0B0F14"/>
-              </a:solidFill>
-              <a:ln w="12700" cap="flat">
-                <a:noFill/>
-                <a:miter lim="400000"/>
-              </a:ln>
-              <a:effectLst/>
-            </p:spPr>
-            <p:txBody>
-              <a:bodyPr wrap="square" lIns="45718" tIns="45718" rIns="45718" bIns="45718" numCol="1" anchor="t">
-                <a:noAutofit/>
-              </a:bodyPr>
-              <a:lstStyle/>
-              <a:p>
-                <a:pPr>
-                  <a:defRPr>
-                    <a:solidFill>
-                      <a:srgbClr val="F8FAFC"/>
-                    </a:solidFill>
-                    <a:latin typeface="Garamond"/>
-                    <a:ea typeface="Garamond"/>
-                    <a:cs typeface="Garamond"/>
-                    <a:sym typeface="Garamond"/>
-                  </a:defRPr>
-                </a:pPr>
-              </a:p>
-            </p:txBody>
-          </p:sp>
-          <p:sp>
-            <p:nvSpPr>
-              <p:cNvPr id="6" name="Freeform 10"/>
-              <p:cNvSpPr/>
-              <p:nvPr/>
-            </p:nvSpPr>
-            <p:spPr>
-              <a:xfrm>
-                <a:off x="5869267" y="138112"/>
-                <a:ext cx="2641491" cy="855666"/>
-              </a:xfrm>
-              <a:custGeom>
-                <a:avLst/>
-                <a:gdLst/>
-                <a:ahLst/>
-                <a:cxnLst>
-                  <a:cxn ang="0">
-                    <a:pos x="wd2" y="hd2"/>
-                  </a:cxn>
-                  <a:cxn ang="5400000">
-                    <a:pos x="wd2" y="hd2"/>
-                  </a:cxn>
-                  <a:cxn ang="10800000">
-                    <a:pos x="wd2" y="hd2"/>
-                  </a:cxn>
-                  <a:cxn ang="16200000">
-                    <a:pos x="wd2" y="hd2"/>
-                  </a:cxn>
-                </a:cxnLst>
-                <a:rect l="0" t="0" r="r" b="b"/>
-                <a:pathLst>
-                  <a:path w="21600" h="21600" fill="norm" stroke="1" extrusionOk="0">
-                    <a:moveTo>
-                      <a:pt x="0" y="13305"/>
-                    </a:moveTo>
-                    <a:lnTo>
-                      <a:pt x="0" y="14427"/>
-                    </a:lnTo>
-                    <a:lnTo>
-                      <a:pt x="87" y="15509"/>
-                    </a:lnTo>
-                    <a:lnTo>
-                      <a:pt x="467" y="16591"/>
-                    </a:lnTo>
-                    <a:lnTo>
-                      <a:pt x="935" y="17472"/>
-                    </a:lnTo>
-                    <a:lnTo>
-                      <a:pt x="1592" y="18554"/>
-                    </a:lnTo>
-                    <a:lnTo>
-                      <a:pt x="2440" y="19636"/>
-                    </a:lnTo>
-                    <a:lnTo>
-                      <a:pt x="3375" y="20518"/>
-                    </a:lnTo>
-                    <a:lnTo>
-                      <a:pt x="4413" y="21600"/>
-                    </a:lnTo>
-                    <a:lnTo>
-                      <a:pt x="3669" y="20718"/>
-                    </a:lnTo>
-                    <a:lnTo>
-                      <a:pt x="3098" y="19636"/>
-                    </a:lnTo>
-                    <a:lnTo>
-                      <a:pt x="2717" y="18755"/>
-                    </a:lnTo>
-                    <a:lnTo>
-                      <a:pt x="2440" y="17913"/>
-                    </a:lnTo>
-                    <a:lnTo>
-                      <a:pt x="2354" y="17032"/>
-                    </a:lnTo>
-                    <a:lnTo>
-                      <a:pt x="2354" y="16150"/>
-                    </a:lnTo>
-                    <a:lnTo>
-                      <a:pt x="2440" y="15268"/>
-                    </a:lnTo>
-                    <a:lnTo>
-                      <a:pt x="3098" y="13745"/>
-                    </a:lnTo>
-                    <a:lnTo>
-                      <a:pt x="3479" y="13104"/>
-                    </a:lnTo>
-                    <a:lnTo>
-                      <a:pt x="4604" y="11782"/>
-                    </a:lnTo>
-                    <a:lnTo>
-                      <a:pt x="6110" y="10499"/>
-                    </a:lnTo>
-                    <a:lnTo>
-                      <a:pt x="7702" y="9377"/>
-                    </a:lnTo>
-                    <a:lnTo>
-                      <a:pt x="9588" y="8536"/>
-                    </a:lnTo>
-                    <a:lnTo>
-                      <a:pt x="11458" y="7654"/>
-                    </a:lnTo>
-                    <a:lnTo>
-                      <a:pt x="15404" y="6131"/>
-                    </a:lnTo>
-                    <a:lnTo>
-                      <a:pt x="17187" y="5450"/>
-                    </a:lnTo>
-                    <a:lnTo>
-                      <a:pt x="18883" y="4809"/>
-                    </a:lnTo>
-                    <a:lnTo>
-                      <a:pt x="20388" y="4609"/>
-                    </a:lnTo>
-                    <a:lnTo>
-                      <a:pt x="21600" y="4168"/>
-                    </a:lnTo>
-                    <a:lnTo>
-                      <a:pt x="21600" y="0"/>
-                    </a:lnTo>
-                    <a:lnTo>
-                      <a:pt x="20094" y="882"/>
-                    </a:lnTo>
-                    <a:lnTo>
-                      <a:pt x="18502" y="1523"/>
-                    </a:lnTo>
-                    <a:lnTo>
-                      <a:pt x="15127" y="2845"/>
-                    </a:lnTo>
-                    <a:lnTo>
-                      <a:pt x="11648" y="3727"/>
-                    </a:lnTo>
-                    <a:lnTo>
-                      <a:pt x="8360" y="5049"/>
-                    </a:lnTo>
-                    <a:lnTo>
-                      <a:pt x="6767" y="5691"/>
-                    </a:lnTo>
-                    <a:lnTo>
-                      <a:pt x="5348" y="6332"/>
-                    </a:lnTo>
-                    <a:lnTo>
-                      <a:pt x="3946" y="7213"/>
-                    </a:lnTo>
-                    <a:lnTo>
-                      <a:pt x="2821" y="8095"/>
-                    </a:lnTo>
-                    <a:lnTo>
-                      <a:pt x="1783" y="9177"/>
-                    </a:lnTo>
-                    <a:lnTo>
-                      <a:pt x="935" y="10259"/>
-                    </a:lnTo>
-                    <a:lnTo>
-                      <a:pt x="381" y="11782"/>
-                    </a:lnTo>
-                    <a:lnTo>
-                      <a:pt x="0" y="13305"/>
-                    </a:lnTo>
-                    <a:close/>
-                  </a:path>
-                </a:pathLst>
-              </a:custGeom>
-              <a:gradFill flip="none" rotWithShape="1">
-                <a:gsLst>
-                  <a:gs pos="0">
-                    <a:srgbClr val="111C2A"/>
-                  </a:gs>
-                  <a:gs pos="100000">
-                    <a:srgbClr val="0B0F14"/>
-                  </a:gs>
-                </a:gsLst>
-                <a:lin ang="2700000" scaled="0"/>
-              </a:gradFill>
-              <a:ln w="12700" cap="flat">
-                <a:noFill/>
-                <a:miter lim="400000"/>
-              </a:ln>
-              <a:effectLst/>
-            </p:spPr>
-            <p:txBody>
-              <a:bodyPr wrap="square" lIns="45718" tIns="45718" rIns="45718" bIns="45718" numCol="1" anchor="t">
-                <a:noAutofit/>
-              </a:bodyPr>
-              <a:lstStyle/>
-              <a:p>
-                <a:pPr>
-                  <a:defRPr>
-                    <a:solidFill>
-                      <a:srgbClr val="F8FAFC"/>
-                    </a:solidFill>
-                    <a:latin typeface="Garamond"/>
-                    <a:ea typeface="Garamond"/>
-                    <a:cs typeface="Garamond"/>
-                    <a:sym typeface="Garamond"/>
-                  </a:defRPr>
-                </a:pPr>
-              </a:p>
-            </p:txBody>
-          </p:sp>
-        </p:grpSp>
-        <p:sp>
-          <p:nvSpPr>
-            <p:cNvPr id="8" name="Freeform 11"/>
-            <p:cNvSpPr/>
-            <p:nvPr/>
-          </p:nvSpPr>
-          <p:spPr>
-            <a:xfrm>
-              <a:off x="3373820" y="-3"/>
-              <a:ext cx="3862755" cy="2439993"/>
-            </a:xfrm>
-            <a:custGeom>
-              <a:avLst/>
-              <a:gdLst/>
-              <a:ahLst/>
-              <a:cxnLst>
-                <a:cxn ang="0">
-                  <a:pos x="wd2" y="hd2"/>
-                </a:cxn>
-                <a:cxn ang="5400000">
-                  <a:pos x="wd2" y="hd2"/>
-                </a:cxn>
-                <a:cxn ang="10800000">
-                  <a:pos x="wd2" y="hd2"/>
-                </a:cxn>
-                <a:cxn ang="16200000">
-                  <a:pos x="wd2" y="hd2"/>
-                </a:cxn>
-              </a:cxnLst>
-              <a:rect l="0" t="0" r="r" b="b"/>
-              <a:pathLst>
-                <a:path w="21600" h="21600" fill="norm" stroke="1" extrusionOk="0">
-                  <a:moveTo>
-                    <a:pt x="7253" y="15998"/>
-                  </a:moveTo>
-                  <a:lnTo>
-                    <a:pt x="9238" y="15601"/>
-                  </a:lnTo>
-                  <a:lnTo>
-                    <a:pt x="11082" y="15204"/>
-                  </a:lnTo>
-                  <a:lnTo>
-                    <a:pt x="12766" y="14880"/>
-                  </a:lnTo>
-                  <a:lnTo>
-                    <a:pt x="14300" y="14483"/>
-                  </a:lnTo>
-                  <a:lnTo>
-                    <a:pt x="15673" y="14072"/>
-                  </a:lnTo>
-                  <a:lnTo>
-                    <a:pt x="16896" y="13675"/>
-                  </a:lnTo>
-                  <a:lnTo>
-                    <a:pt x="18025" y="13189"/>
-                  </a:lnTo>
-                  <a:lnTo>
-                    <a:pt x="18938" y="12792"/>
-                  </a:lnTo>
-                  <a:lnTo>
-                    <a:pt x="19756" y="12234"/>
-                  </a:lnTo>
-                  <a:lnTo>
-                    <a:pt x="20424" y="11763"/>
-                  </a:lnTo>
-                  <a:lnTo>
-                    <a:pt x="20885" y="11116"/>
-                  </a:lnTo>
-                  <a:lnTo>
-                    <a:pt x="21290" y="10469"/>
-                  </a:lnTo>
-                  <a:lnTo>
-                    <a:pt x="21497" y="9837"/>
-                  </a:lnTo>
-                  <a:lnTo>
-                    <a:pt x="21600" y="9028"/>
-                  </a:lnTo>
-                  <a:lnTo>
-                    <a:pt x="21544" y="8234"/>
-                  </a:lnTo>
-                  <a:lnTo>
-                    <a:pt x="21346" y="7352"/>
-                  </a:lnTo>
-                  <a:lnTo>
-                    <a:pt x="21083" y="6720"/>
-                  </a:lnTo>
-                  <a:lnTo>
-                    <a:pt x="20678" y="5999"/>
-                  </a:lnTo>
-                  <a:lnTo>
-                    <a:pt x="20170" y="5352"/>
-                  </a:lnTo>
-                  <a:lnTo>
-                    <a:pt x="19559" y="4720"/>
-                  </a:lnTo>
-                  <a:lnTo>
-                    <a:pt x="18891" y="4073"/>
-                  </a:lnTo>
-                  <a:lnTo>
-                    <a:pt x="18129" y="3441"/>
-                  </a:lnTo>
-                  <a:lnTo>
-                    <a:pt x="16642" y="2309"/>
-                  </a:lnTo>
-                  <a:lnTo>
-                    <a:pt x="15880" y="1838"/>
-                  </a:lnTo>
-                  <a:lnTo>
-                    <a:pt x="15165" y="1353"/>
-                  </a:lnTo>
-                  <a:lnTo>
-                    <a:pt x="14450" y="956"/>
-                  </a:lnTo>
-                  <a:lnTo>
-                    <a:pt x="13886" y="632"/>
-                  </a:lnTo>
-                  <a:lnTo>
-                    <a:pt x="13378" y="397"/>
-                  </a:lnTo>
-                  <a:lnTo>
-                    <a:pt x="13020" y="147"/>
-                  </a:lnTo>
-                  <a:lnTo>
-                    <a:pt x="12766" y="74"/>
-                  </a:lnTo>
-                  <a:lnTo>
-                    <a:pt x="12663" y="0"/>
-                  </a:lnTo>
-                  <a:lnTo>
-                    <a:pt x="14093" y="794"/>
-                  </a:lnTo>
-                  <a:lnTo>
-                    <a:pt x="15570" y="1750"/>
-                  </a:lnTo>
-                  <a:lnTo>
-                    <a:pt x="17000" y="2720"/>
-                  </a:lnTo>
-                  <a:lnTo>
-                    <a:pt x="18326" y="3749"/>
-                  </a:lnTo>
-                  <a:lnTo>
-                    <a:pt x="18938" y="4235"/>
-                  </a:lnTo>
-                  <a:lnTo>
-                    <a:pt x="19455" y="4793"/>
-                  </a:lnTo>
-                  <a:lnTo>
-                    <a:pt x="19963" y="5352"/>
-                  </a:lnTo>
-                  <a:lnTo>
-                    <a:pt x="20424" y="5911"/>
-                  </a:lnTo>
-                  <a:lnTo>
-                    <a:pt x="20782" y="6470"/>
-                  </a:lnTo>
-                  <a:lnTo>
-                    <a:pt x="21036" y="7028"/>
-                  </a:lnTo>
-                  <a:lnTo>
-                    <a:pt x="21186" y="7675"/>
-                  </a:lnTo>
-                  <a:lnTo>
-                    <a:pt x="21290" y="8234"/>
-                  </a:lnTo>
-                  <a:lnTo>
-                    <a:pt x="21243" y="8793"/>
-                  </a:lnTo>
-                  <a:lnTo>
-                    <a:pt x="21083" y="9352"/>
-                  </a:lnTo>
-                  <a:lnTo>
-                    <a:pt x="20829" y="9837"/>
-                  </a:lnTo>
-                  <a:lnTo>
-                    <a:pt x="20424" y="10322"/>
-                  </a:lnTo>
-                  <a:lnTo>
-                    <a:pt x="19963" y="10719"/>
-                  </a:lnTo>
-                  <a:lnTo>
-                    <a:pt x="19399" y="11116"/>
-                  </a:lnTo>
-                  <a:lnTo>
-                    <a:pt x="18787" y="11440"/>
-                  </a:lnTo>
-                  <a:lnTo>
-                    <a:pt x="18072" y="11763"/>
-                  </a:lnTo>
-                  <a:lnTo>
-                    <a:pt x="17254" y="12072"/>
-                  </a:lnTo>
-                  <a:lnTo>
-                    <a:pt x="16445" y="12395"/>
-                  </a:lnTo>
-                  <a:lnTo>
-                    <a:pt x="14601" y="12881"/>
-                  </a:lnTo>
-                  <a:lnTo>
-                    <a:pt x="12710" y="13351"/>
-                  </a:lnTo>
-                  <a:lnTo>
-                    <a:pt x="10668" y="13836"/>
-                  </a:lnTo>
-                  <a:lnTo>
-                    <a:pt x="8683" y="14233"/>
-                  </a:lnTo>
-                  <a:lnTo>
-                    <a:pt x="6736" y="14630"/>
-                  </a:lnTo>
-                  <a:lnTo>
-                    <a:pt x="4901" y="15116"/>
-                  </a:lnTo>
-                  <a:lnTo>
-                    <a:pt x="4083" y="15351"/>
-                  </a:lnTo>
-                  <a:lnTo>
-                    <a:pt x="3321" y="15674"/>
-                  </a:lnTo>
-                  <a:lnTo>
-                    <a:pt x="2606" y="15910"/>
-                  </a:lnTo>
-                  <a:lnTo>
-                    <a:pt x="1938" y="16233"/>
-                  </a:lnTo>
-                  <a:lnTo>
-                    <a:pt x="1383" y="16557"/>
-                  </a:lnTo>
-                  <a:lnTo>
-                    <a:pt x="866" y="16880"/>
-                  </a:lnTo>
-                  <a:lnTo>
-                    <a:pt x="508" y="17277"/>
-                  </a:lnTo>
-                  <a:lnTo>
-                    <a:pt x="207" y="17674"/>
-                  </a:lnTo>
-                  <a:lnTo>
-                    <a:pt x="56" y="18071"/>
-                  </a:lnTo>
-                  <a:lnTo>
-                    <a:pt x="0" y="18556"/>
-                  </a:lnTo>
-                  <a:lnTo>
-                    <a:pt x="103" y="19042"/>
-                  </a:lnTo>
-                  <a:lnTo>
-                    <a:pt x="254" y="19512"/>
-                  </a:lnTo>
-                  <a:lnTo>
-                    <a:pt x="508" y="19924"/>
-                  </a:lnTo>
-                  <a:lnTo>
-                    <a:pt x="922" y="20321"/>
-                  </a:lnTo>
-                  <a:lnTo>
-                    <a:pt x="1326" y="20644"/>
-                  </a:lnTo>
-                  <a:lnTo>
-                    <a:pt x="1844" y="20953"/>
-                  </a:lnTo>
-                  <a:lnTo>
-                    <a:pt x="2455" y="21277"/>
-                  </a:lnTo>
-                  <a:lnTo>
-                    <a:pt x="3067" y="21600"/>
-                  </a:lnTo>
-                  <a:lnTo>
-                    <a:pt x="2502" y="21203"/>
-                  </a:lnTo>
-                  <a:lnTo>
-                    <a:pt x="2041" y="20791"/>
-                  </a:lnTo>
-                  <a:lnTo>
-                    <a:pt x="1637" y="20394"/>
-                  </a:lnTo>
-                  <a:lnTo>
-                    <a:pt x="1383" y="19997"/>
-                  </a:lnTo>
-                  <a:lnTo>
-                    <a:pt x="1176" y="19600"/>
-                  </a:lnTo>
-                  <a:lnTo>
-                    <a:pt x="1129" y="19203"/>
-                  </a:lnTo>
-                  <a:lnTo>
-                    <a:pt x="1176" y="18792"/>
-                  </a:lnTo>
-                  <a:lnTo>
-                    <a:pt x="1326" y="18483"/>
-                  </a:lnTo>
-                  <a:lnTo>
-                    <a:pt x="1637" y="18071"/>
-                  </a:lnTo>
-                  <a:lnTo>
-                    <a:pt x="1994" y="17762"/>
-                  </a:lnTo>
-                  <a:lnTo>
-                    <a:pt x="2559" y="17439"/>
-                  </a:lnTo>
-                  <a:lnTo>
-                    <a:pt x="3217" y="17115"/>
-                  </a:lnTo>
-                  <a:lnTo>
-                    <a:pt x="3979" y="16792"/>
-                  </a:lnTo>
-                  <a:lnTo>
-                    <a:pt x="4958" y="16483"/>
-                  </a:lnTo>
-                  <a:lnTo>
-                    <a:pt x="6030" y="16233"/>
-                  </a:lnTo>
-                  <a:lnTo>
-                    <a:pt x="7253" y="15998"/>
-                  </a:lnTo>
-                  <a:close/>
-                </a:path>
-              </a:pathLst>
-            </a:custGeom>
-            <a:gradFill flip="none" rotWithShape="1">
-              <a:gsLst>
-                <a:gs pos="0">
-                  <a:srgbClr val="0F172A"/>
-                </a:gs>
-                <a:gs pos="100000">
-                  <a:srgbClr val="0B0F14"/>
-                </a:gs>
-              </a:gsLst>
-              <a:lin ang="2700000" scaled="0"/>
-            </a:gradFill>
-            <a:ln w="12700" cap="flat">
-              <a:noFill/>
-              <a:miter lim="400000"/>
-            </a:ln>
-            <a:effectLst/>
-          </p:spPr>
-          <p:txBody>
-            <a:bodyPr wrap="square" lIns="45718" tIns="45718" rIns="45718" bIns="45718" numCol="1" anchor="t">
-              <a:noAutofit/>
-            </a:bodyPr>
-            <a:lstStyle/>
-            <a:p>
-              <a:pPr>
-                <a:defRPr>
-                  <a:solidFill>
-                    <a:srgbClr val="F8FAFC"/>
-                  </a:solidFill>
-                  <a:latin typeface="Garamond"/>
-                  <a:ea typeface="Garamond"/>
-                  <a:cs typeface="Garamond"/>
-                  <a:sym typeface="Garamond"/>
-                </a:defRPr>
-              </a:pPr>
-            </a:p>
-          </p:txBody>
-        </p:sp>
-      </p:grpSp>
       <p:pic>
         <p:nvPicPr>
           <p:cNvPr id="10" name="MVCCC Logo" descr="MVCCC Logo"/>
@@ -3396,7 +1650,7 @@
           </a:solidFill>
           <a:effectLst>
             <a:outerShdw sx="100000" sy="100000" kx="0" ky="0" algn="b" rotWithShape="0" blurRad="38100" dist="38100" dir="2700000">
-              <a:srgbClr val="0B0F14"/>
+              <a:srgbClr val="10064F"/>
             </a:outerShdw>
           </a:effectLst>
           <a:uFillTx/>
@@ -3427,7 +1681,7 @@
           </a:solidFill>
           <a:effectLst>
             <a:outerShdw sx="100000" sy="100000" kx="0" ky="0" algn="b" rotWithShape="0" blurRad="38100" dist="38100" dir="2700000">
-              <a:srgbClr val="0B0F14"/>
+              <a:srgbClr val="10064F"/>
             </a:outerShdw>
           </a:effectLst>
           <a:uFillTx/>
@@ -3458,7 +1712,7 @@
           </a:solidFill>
           <a:effectLst>
             <a:outerShdw sx="100000" sy="100000" kx="0" ky="0" algn="b" rotWithShape="0" blurRad="38100" dist="38100" dir="2700000">
-              <a:srgbClr val="0B0F14"/>
+              <a:srgbClr val="10064F"/>
             </a:outerShdw>
           </a:effectLst>
           <a:uFillTx/>
@@ -3489,7 +1743,7 @@
           </a:solidFill>
           <a:effectLst>
             <a:outerShdw sx="100000" sy="100000" kx="0" ky="0" algn="b" rotWithShape="0" blurRad="38100" dist="38100" dir="2700000">
-              <a:srgbClr val="0B0F14"/>
+              <a:srgbClr val="10064F"/>
             </a:outerShdw>
           </a:effectLst>
           <a:uFillTx/>
@@ -3520,7 +1774,7 @@
           </a:solidFill>
           <a:effectLst>
             <a:outerShdw sx="100000" sy="100000" kx="0" ky="0" algn="b" rotWithShape="0" blurRad="38100" dist="38100" dir="2700000">
-              <a:srgbClr val="0B0F14"/>
+              <a:srgbClr val="10064F"/>
             </a:outerShdw>
           </a:effectLst>
           <a:uFillTx/>
@@ -3551,7 +1805,7 @@
           </a:solidFill>
           <a:effectLst>
             <a:outerShdw sx="100000" sy="100000" kx="0" ky="0" algn="b" rotWithShape="0" blurRad="38100" dist="38100" dir="2700000">
-              <a:srgbClr val="0B0F14"/>
+              <a:srgbClr val="10064F"/>
             </a:outerShdw>
           </a:effectLst>
           <a:uFillTx/>
@@ -3582,7 +1836,7 @@
           </a:solidFill>
           <a:effectLst>
             <a:outerShdw sx="100000" sy="100000" kx="0" ky="0" algn="b" rotWithShape="0" blurRad="38100" dist="38100" dir="2700000">
-              <a:srgbClr val="0B0F14"/>
+              <a:srgbClr val="10064F"/>
             </a:outerShdw>
           </a:effectLst>
           <a:uFillTx/>
@@ -3613,7 +1867,7 @@
           </a:solidFill>
           <a:effectLst>
             <a:outerShdw sx="100000" sy="100000" kx="0" ky="0" algn="b" rotWithShape="0" blurRad="38100" dist="38100" dir="2700000">
-              <a:srgbClr val="0B0F14"/>
+              <a:srgbClr val="10064F"/>
             </a:outerShdw>
           </a:effectLst>
           <a:uFillTx/>
@@ -3644,7 +1898,7 @@
           </a:solidFill>
           <a:effectLst>
             <a:outerShdw sx="100000" sy="100000" kx="0" ky="0" algn="b" rotWithShape="0" blurRad="38100" dist="38100" dir="2700000">
-              <a:srgbClr val="0B0F14"/>
+              <a:srgbClr val="10064F"/>
             </a:outerShdw>
           </a:effectLst>
           <a:uFillTx/>
@@ -3677,7 +1931,7 @@
           </a:solidFill>
           <a:effectLst>
             <a:outerShdw sx="100000" sy="100000" kx="0" ky="0" algn="b" rotWithShape="0" blurRad="38100" dist="38100" dir="2700000">
-              <a:srgbClr val="0B0F14"/>
+              <a:srgbClr val="10064F"/>
             </a:outerShdw>
           </a:effectLst>
           <a:uFillTx/>
@@ -3708,7 +1962,7 @@
           </a:solidFill>
           <a:effectLst>
             <a:outerShdw sx="100000" sy="100000" kx="0" ky="0" algn="b" rotWithShape="0" blurRad="38100" dist="38100" dir="2700000">
-              <a:srgbClr val="0B0F14"/>
+              <a:srgbClr val="10064F"/>
             </a:outerShdw>
           </a:effectLst>
           <a:uFillTx/>
@@ -3739,7 +1993,7 @@
           </a:solidFill>
           <a:effectLst>
             <a:outerShdw sx="100000" sy="100000" kx="0" ky="0" algn="b" rotWithShape="0" blurRad="38100" dist="38100" dir="2700000">
-              <a:srgbClr val="0B0F14"/>
+              <a:srgbClr val="10064F"/>
             </a:outerShdw>
           </a:effectLst>
           <a:uFillTx/>
@@ -3770,7 +2024,7 @@
           </a:solidFill>
           <a:effectLst>
             <a:outerShdw sx="100000" sy="100000" kx="0" ky="0" algn="b" rotWithShape="0" blurRad="38100" dist="38100" dir="2700000">
-              <a:srgbClr val="0B0F14"/>
+              <a:srgbClr val="10064F"/>
             </a:outerShdw>
           </a:effectLst>
           <a:uFillTx/>
@@ -3801,7 +2055,7 @@
           </a:solidFill>
           <a:effectLst>
             <a:outerShdw sx="100000" sy="100000" kx="0" ky="0" algn="b" rotWithShape="0" blurRad="38100" dist="38100" dir="2700000">
-              <a:srgbClr val="0B0F14"/>
+              <a:srgbClr val="10064F"/>
             </a:outerShdw>
           </a:effectLst>
           <a:uFillTx/>
@@ -3832,7 +2086,7 @@
           </a:solidFill>
           <a:effectLst>
             <a:outerShdw sx="100000" sy="100000" kx="0" ky="0" algn="b" rotWithShape="0" blurRad="38100" dist="38100" dir="2700000">
-              <a:srgbClr val="0B0F14"/>
+              <a:srgbClr val="10064F"/>
             </a:outerShdw>
           </a:effectLst>
           <a:uFillTx/>
@@ -3863,7 +2117,7 @@
           </a:solidFill>
           <a:effectLst>
             <a:outerShdw sx="100000" sy="100000" kx="0" ky="0" algn="b" rotWithShape="0" blurRad="38100" dist="38100" dir="2700000">
-              <a:srgbClr val="0B0F14"/>
+              <a:srgbClr val="10064F"/>
             </a:outerShdw>
           </a:effectLst>
           <a:uFillTx/>
@@ -3894,7 +2148,7 @@
           </a:solidFill>
           <a:effectLst>
             <a:outerShdw sx="100000" sy="100000" kx="0" ky="0" algn="b" rotWithShape="0" blurRad="38100" dist="38100" dir="2700000">
-              <a:srgbClr val="0B0F14"/>
+              <a:srgbClr val="10064F"/>
             </a:outerShdw>
           </a:effectLst>
           <a:uFillTx/>
@@ -3925,7 +2179,7 @@
           </a:solidFill>
           <a:effectLst>
             <a:outerShdw sx="100000" sy="100000" kx="0" ky="0" algn="b" rotWithShape="0" blurRad="38100" dist="38100" dir="2700000">
-              <a:srgbClr val="0B0F14"/>
+              <a:srgbClr val="10064F"/>
             </a:outerShdw>
           </a:effectLst>
           <a:uFillTx/>
@@ -4201,8 +2455,19 @@
           <a:bodyPr/>
           <a:lstStyle/>
           <a:p>
-            <a:r>
-              <a:t>記念主名</a:t>
+            <a:pPr>
+              <a:defRPr sz="4000"/>
+            </a:pPr>
+            <a:r>
+              <a:t>教會聖詩 #157</a:t>
+            </a:r>
+          </a:p>
+          <a:p>
+            <a:pPr>
+              <a:defRPr sz="8000" b="1"/>
+            </a:pPr>
+            <a:r>
+              <a:t>《記念主名》</a:t>
             </a:r>
           </a:p>
         </p:txBody>
@@ -4261,6 +2526,36 @@
           </a:p>
         </p:txBody>
       </p:sp>
+      <p:sp>
+        <p:nvSpPr>
+          <p:cNvPr id="3" name="TextBox 2"/>
+          <p:cNvSpPr txBox="1"/>
+          <p:nvPr/>
+        </p:nvSpPr>
+        <p:spPr>
+          <a:xfrm>
+            <a:off x="10591800" y="228600"/>
+            <a:ext cx="1371600" cy="365760"/>
+          </a:xfrm>
+          <a:prstGeom prst="rect">
+            <a:avLst/>
+          </a:prstGeom>
+          <a:noFill/>
+        </p:spPr>
+        <p:txBody>
+          <a:bodyPr wrap="none" bIns="0" tIns="0" lIns="0" rIns="0">
+            <a:spAutoFit/>
+          </a:bodyPr>
+          <a:lstStyle/>
+          <a:p>
+            <a:pPr algn="r"/>
+            <a:r>
+              <a:rPr sz="1800"/>
+              <a:t>(1)</a:t>
+            </a:r>
+          </a:p>
+        </p:txBody>
+      </p:sp>
     </p:spTree>
   </p:cSld>
   <p:clrMapOvr>
@@ -4295,22 +2590,52 @@
           <a:lstStyle/>
           <a:p>
             <a:r>
-              <a:t> 處處記念耶穌聖名，</a:t>
-            </a:r>
-          </a:p>
-          <a:p>
-            <a:r>
-              <a:t>當作盾牌敵魔劍；</a:t>
-            </a:r>
-          </a:p>
-          <a:p>
-            <a:r>
-              <a:t>眾惑環繞齊來攻逼，</a:t>
-            </a:r>
-          </a:p>
-          <a:p>
-            <a:r>
-              <a:t>靠主聖名就得勝。</a:t>
+              <a:t> 名至寶，名最甜！</a:t>
+            </a:r>
+          </a:p>
+          <a:p>
+            <a:r>
+              <a:t>地之望而天之樂;</a:t>
+            </a:r>
+          </a:p>
+          <a:p>
+            <a:r>
+              <a:t>名至寶，名最甜！</a:t>
+            </a:r>
+          </a:p>
+          <a:p>
+            <a:r>
+              <a:t>地之望而天之樂。</a:t>
+            </a:r>
+          </a:p>
+        </p:txBody>
+      </p:sp>
+      <p:sp>
+        <p:nvSpPr>
+          <p:cNvPr id="3" name="TextBox 2"/>
+          <p:cNvSpPr txBox="1"/>
+          <p:nvPr/>
+        </p:nvSpPr>
+        <p:spPr>
+          <a:xfrm>
+            <a:off x="10591800" y="228600"/>
+            <a:ext cx="1371600" cy="365760"/>
+          </a:xfrm>
+          <a:prstGeom prst="rect">
+            <a:avLst/>
+          </a:prstGeom>
+          <a:noFill/>
+        </p:spPr>
+        <p:txBody>
+          <a:bodyPr wrap="none" bIns="0" tIns="0" lIns="0" rIns="0">
+            <a:spAutoFit/>
+          </a:bodyPr>
+          <a:lstStyle/>
+          <a:p>
+            <a:pPr algn="r"/>
+            <a:r>
+              <a:rPr sz="1800"/>
+              <a:t>(1)</a:t>
             </a:r>
           </a:p>
         </p:txBody>
@@ -4349,22 +2674,52 @@
           <a:lstStyle/>
           <a:p>
             <a:r>
-              <a:t> 耶穌名字馨香寶貴，</a:t>
-            </a:r>
-          </a:p>
-          <a:p>
-            <a:r>
-              <a:t>我一聽聞就歡欣；</a:t>
-            </a:r>
-          </a:p>
-          <a:p>
-            <a:r>
-              <a:t>但願人人得其安慰，</a:t>
-            </a:r>
-          </a:p>
-          <a:p>
-            <a:r>
-              <a:t>同我稱頌主聖名。</a:t>
+              <a:t> 處處記念耶穌聖名，</a:t>
+            </a:r>
+          </a:p>
+          <a:p>
+            <a:r>
+              <a:t>當作盾牌敵魔劍；</a:t>
+            </a:r>
+          </a:p>
+          <a:p>
+            <a:r>
+              <a:t>眾惑環繞齊來攻逼，</a:t>
+            </a:r>
+          </a:p>
+          <a:p>
+            <a:r>
+              <a:t>靠主聖名就得勝。</a:t>
+            </a:r>
+          </a:p>
+        </p:txBody>
+      </p:sp>
+      <p:sp>
+        <p:nvSpPr>
+          <p:cNvPr id="3" name="TextBox 2"/>
+          <p:cNvSpPr txBox="1"/>
+          <p:nvPr/>
+        </p:nvSpPr>
+        <p:spPr>
+          <a:xfrm>
+            <a:off x="10591800" y="228600"/>
+            <a:ext cx="1371600" cy="365760"/>
+          </a:xfrm>
+          <a:prstGeom prst="rect">
+            <a:avLst/>
+          </a:prstGeom>
+          <a:noFill/>
+        </p:spPr>
+        <p:txBody>
+          <a:bodyPr wrap="none" bIns="0" tIns="0" lIns="0" rIns="0">
+            <a:spAutoFit/>
+          </a:bodyPr>
+          <a:lstStyle/>
+          <a:p>
+            <a:pPr algn="r"/>
+            <a:r>
+              <a:rPr sz="1800"/>
+              <a:t>(2)</a:t>
             </a:r>
           </a:p>
         </p:txBody>
@@ -4403,22 +2758,52 @@
           <a:lstStyle/>
           <a:p>
             <a:r>
-              <a:t> 經歷世途艱辛疲累，</a:t>
-            </a:r>
-          </a:p>
-          <a:p>
-            <a:r>
-              <a:t>聽見主名心歡暢；</a:t>
-            </a:r>
-          </a:p>
-          <a:p>
-            <a:r>
-              <a:t>摘下冠冕主前伏拜，</a:t>
-            </a:r>
-          </a:p>
-          <a:p>
-            <a:r>
-              <a:t>歡稱耶穌是我王。</a:t>
+              <a:t> 名至寶，名最甜！</a:t>
+            </a:r>
+          </a:p>
+          <a:p>
+            <a:r>
+              <a:t>地之望而天之樂;</a:t>
+            </a:r>
+          </a:p>
+          <a:p>
+            <a:r>
+              <a:t>名至寶，名最甜！</a:t>
+            </a:r>
+          </a:p>
+          <a:p>
+            <a:r>
+              <a:t>地之望而天之樂。</a:t>
+            </a:r>
+          </a:p>
+        </p:txBody>
+      </p:sp>
+      <p:sp>
+        <p:nvSpPr>
+          <p:cNvPr id="3" name="TextBox 2"/>
+          <p:cNvSpPr txBox="1"/>
+          <p:nvPr/>
+        </p:nvSpPr>
+        <p:spPr>
+          <a:xfrm>
+            <a:off x="10591800" y="228600"/>
+            <a:ext cx="1371600" cy="365760"/>
+          </a:xfrm>
+          <a:prstGeom prst="rect">
+            <a:avLst/>
+          </a:prstGeom>
+          <a:noFill/>
+        </p:spPr>
+        <p:txBody>
+          <a:bodyPr wrap="none" bIns="0" tIns="0" lIns="0" rIns="0">
+            <a:spAutoFit/>
+          </a:bodyPr>
+          <a:lstStyle/>
+          <a:p>
+            <a:pPr algn="r"/>
+            <a:r>
+              <a:rPr sz="1800"/>
+              <a:t>(2)</a:t>
             </a:r>
           </a:p>
         </p:txBody>
@@ -4457,6 +2842,90 @@
           <a:lstStyle/>
           <a:p>
             <a:r>
+              <a:t> 耶穌名字馨香寶貴，</a:t>
+            </a:r>
+          </a:p>
+          <a:p>
+            <a:r>
+              <a:t>我一聽聞就歡欣；</a:t>
+            </a:r>
+          </a:p>
+          <a:p>
+            <a:r>
+              <a:t>但願人人得其安慰，</a:t>
+            </a:r>
+          </a:p>
+          <a:p>
+            <a:r>
+              <a:t>同我稱頌主聖名。</a:t>
+            </a:r>
+          </a:p>
+        </p:txBody>
+      </p:sp>
+      <p:sp>
+        <p:nvSpPr>
+          <p:cNvPr id="3" name="TextBox 2"/>
+          <p:cNvSpPr txBox="1"/>
+          <p:nvPr/>
+        </p:nvSpPr>
+        <p:spPr>
+          <a:xfrm>
+            <a:off x="10591800" y="228600"/>
+            <a:ext cx="1371600" cy="365760"/>
+          </a:xfrm>
+          <a:prstGeom prst="rect">
+            <a:avLst/>
+          </a:prstGeom>
+          <a:noFill/>
+        </p:spPr>
+        <p:txBody>
+          <a:bodyPr wrap="none" bIns="0" tIns="0" lIns="0" rIns="0">
+            <a:spAutoFit/>
+          </a:bodyPr>
+          <a:lstStyle/>
+          <a:p>
+            <a:pPr algn="r"/>
+            <a:r>
+              <a:rPr sz="1800"/>
+              <a:t>(3)</a:t>
+            </a:r>
+          </a:p>
+        </p:txBody>
+      </p:sp>
+    </p:spTree>
+  </p:cSld>
+  <p:clrMapOvr>
+    <a:masterClrMapping/>
+  </p:clrMapOvr>
+</p:sld>
+</file>
+
+<file path=ppt/slides/slide7.xml><?xml version="1.0" encoding="utf-8"?>
+<p:sld xmlns:a="http://schemas.openxmlformats.org/drawingml/2006/main" xmlns:p="http://schemas.openxmlformats.org/presentationml/2006/main" xmlns:r="http://schemas.openxmlformats.org/officeDocument/2006/relationships">
+  <p:cSld>
+    <p:spTree>
+      <p:nvGrpSpPr>
+        <p:cNvPr id="1" name=""/>
+        <p:cNvGrpSpPr/>
+        <p:nvPr/>
+      </p:nvGrpSpPr>
+      <p:grpSpPr/>
+      <p:sp>
+        <p:nvSpPr>
+          <p:cNvPr id="2" name="Text Placeholder 1"/>
+          <p:cNvSpPr>
+            <a:spLocks noGrp="1"/>
+          </p:cNvSpPr>
+          <p:nvPr>
+            <p:ph type="body" idx="21"/>
+          </p:nvPr>
+        </p:nvSpPr>
+        <p:spPr/>
+        <p:txBody>
+          <a:bodyPr/>
+          <a:lstStyle/>
+          <a:p>
+            <a:r>
               <a:t> 名至寶，名最甜！</a:t>
             </a:r>
           </a:p>
@@ -4473,6 +2942,204 @@
           <a:p>
             <a:r>
               <a:t>地之望而天之樂。</a:t>
+            </a:r>
+          </a:p>
+        </p:txBody>
+      </p:sp>
+      <p:sp>
+        <p:nvSpPr>
+          <p:cNvPr id="3" name="TextBox 2"/>
+          <p:cNvSpPr txBox="1"/>
+          <p:nvPr/>
+        </p:nvSpPr>
+        <p:spPr>
+          <a:xfrm>
+            <a:off x="10591800" y="228600"/>
+            <a:ext cx="1371600" cy="365760"/>
+          </a:xfrm>
+          <a:prstGeom prst="rect">
+            <a:avLst/>
+          </a:prstGeom>
+          <a:noFill/>
+        </p:spPr>
+        <p:txBody>
+          <a:bodyPr wrap="none" bIns="0" tIns="0" lIns="0" rIns="0">
+            <a:spAutoFit/>
+          </a:bodyPr>
+          <a:lstStyle/>
+          <a:p>
+            <a:pPr algn="r"/>
+            <a:r>
+              <a:rPr sz="1800"/>
+              <a:t>(3)</a:t>
+            </a:r>
+          </a:p>
+        </p:txBody>
+      </p:sp>
+    </p:spTree>
+  </p:cSld>
+  <p:clrMapOvr>
+    <a:masterClrMapping/>
+  </p:clrMapOvr>
+</p:sld>
+</file>
+
+<file path=ppt/slides/slide8.xml><?xml version="1.0" encoding="utf-8"?>
+<p:sld xmlns:a="http://schemas.openxmlformats.org/drawingml/2006/main" xmlns:p="http://schemas.openxmlformats.org/presentationml/2006/main" xmlns:r="http://schemas.openxmlformats.org/officeDocument/2006/relationships">
+  <p:cSld>
+    <p:spTree>
+      <p:nvGrpSpPr>
+        <p:cNvPr id="1" name=""/>
+        <p:cNvGrpSpPr/>
+        <p:nvPr/>
+      </p:nvGrpSpPr>
+      <p:grpSpPr/>
+      <p:sp>
+        <p:nvSpPr>
+          <p:cNvPr id="2" name="Text Placeholder 1"/>
+          <p:cNvSpPr>
+            <a:spLocks noGrp="1"/>
+          </p:cNvSpPr>
+          <p:nvPr>
+            <p:ph type="body" idx="21"/>
+          </p:nvPr>
+        </p:nvSpPr>
+        <p:spPr/>
+        <p:txBody>
+          <a:bodyPr/>
+          <a:lstStyle/>
+          <a:p>
+            <a:r>
+              <a:t> 經歷世途艱辛疲累，</a:t>
+            </a:r>
+          </a:p>
+          <a:p>
+            <a:r>
+              <a:t>聽見主名心歡暢；</a:t>
+            </a:r>
+          </a:p>
+          <a:p>
+            <a:r>
+              <a:t>摘下冠冕主前伏拜，</a:t>
+            </a:r>
+          </a:p>
+          <a:p>
+            <a:r>
+              <a:t>歡稱耶穌是我王。</a:t>
+            </a:r>
+          </a:p>
+        </p:txBody>
+      </p:sp>
+      <p:sp>
+        <p:nvSpPr>
+          <p:cNvPr id="3" name="TextBox 2"/>
+          <p:cNvSpPr txBox="1"/>
+          <p:nvPr/>
+        </p:nvSpPr>
+        <p:spPr>
+          <a:xfrm>
+            <a:off x="10591800" y="228600"/>
+            <a:ext cx="1371600" cy="365760"/>
+          </a:xfrm>
+          <a:prstGeom prst="rect">
+            <a:avLst/>
+          </a:prstGeom>
+          <a:noFill/>
+        </p:spPr>
+        <p:txBody>
+          <a:bodyPr wrap="none" bIns="0" tIns="0" lIns="0" rIns="0">
+            <a:spAutoFit/>
+          </a:bodyPr>
+          <a:lstStyle/>
+          <a:p>
+            <a:pPr algn="r"/>
+            <a:r>
+              <a:rPr sz="1800"/>
+              <a:t>(4)</a:t>
+            </a:r>
+          </a:p>
+        </p:txBody>
+      </p:sp>
+    </p:spTree>
+  </p:cSld>
+  <p:clrMapOvr>
+    <a:masterClrMapping/>
+  </p:clrMapOvr>
+</p:sld>
+</file>
+
+<file path=ppt/slides/slide9.xml><?xml version="1.0" encoding="utf-8"?>
+<p:sld xmlns:a="http://schemas.openxmlformats.org/drawingml/2006/main" xmlns:p="http://schemas.openxmlformats.org/presentationml/2006/main" xmlns:r="http://schemas.openxmlformats.org/officeDocument/2006/relationships">
+  <p:cSld>
+    <p:spTree>
+      <p:nvGrpSpPr>
+        <p:cNvPr id="1" name=""/>
+        <p:cNvGrpSpPr/>
+        <p:nvPr/>
+      </p:nvGrpSpPr>
+      <p:grpSpPr/>
+      <p:sp>
+        <p:nvSpPr>
+          <p:cNvPr id="2" name="Text Placeholder 1"/>
+          <p:cNvSpPr>
+            <a:spLocks noGrp="1"/>
+          </p:cNvSpPr>
+          <p:nvPr>
+            <p:ph type="body" idx="21"/>
+          </p:nvPr>
+        </p:nvSpPr>
+        <p:spPr/>
+        <p:txBody>
+          <a:bodyPr/>
+          <a:lstStyle/>
+          <a:p>
+            <a:r>
+              <a:t> 名至寶，名最甜！</a:t>
+            </a:r>
+          </a:p>
+          <a:p>
+            <a:r>
+              <a:t>地之望而天之樂;</a:t>
+            </a:r>
+          </a:p>
+          <a:p>
+            <a:r>
+              <a:t>名至寶，名最甜！</a:t>
+            </a:r>
+          </a:p>
+          <a:p>
+            <a:r>
+              <a:t>地之望而天之樂。</a:t>
+            </a:r>
+          </a:p>
+        </p:txBody>
+      </p:sp>
+      <p:sp>
+        <p:nvSpPr>
+          <p:cNvPr id="3" name="TextBox 2"/>
+          <p:cNvSpPr txBox="1"/>
+          <p:nvPr/>
+        </p:nvSpPr>
+        <p:spPr>
+          <a:xfrm>
+            <a:off x="10591800" y="228600"/>
+            <a:ext cx="1371600" cy="365760"/>
+          </a:xfrm>
+          <a:prstGeom prst="rect">
+            <a:avLst/>
+          </a:prstGeom>
+          <a:noFill/>
+        </p:spPr>
+        <p:txBody>
+          <a:bodyPr wrap="none" bIns="0" tIns="0" lIns="0" rIns="0">
+            <a:spAutoFit/>
+          </a:bodyPr>
+          <a:lstStyle/>
+          <a:p>
+            <a:pPr algn="r"/>
+            <a:r>
+              <a:rPr sz="1800"/>
+              <a:t>(4)</a:t>
             </a:r>
           </a:p>
         </p:txBody>
@@ -4490,13 +3157,13 @@
   <a:themeElements>
     <a:clrScheme name="Stream_blue">
       <a:dk1>
-        <a:srgbClr val="0B0F14"/>
+        <a:srgbClr val="10064F"/>
       </a:dk1>
       <a:lt1>
-        <a:srgbClr val="0B0F14"/>
+        <a:srgbClr val="10064F"/>
       </a:lt1>
       <a:dk2>
-        <a:srgbClr val="A7A7A7"/>
+        <a:srgbClr val="FFFFFF"/>
       </a:dk2>
       <a:lt2>
         <a:srgbClr val="535353"/>
@@ -4517,7 +3184,7 @@
         <a:srgbClr val="38BDF8"/>
       </a:accent5>
       <a:accent6>
-        <a:srgbClr val="F6C453"/>
+        <a:srgbClr val="FFFFFF"/>
       </a:accent6>
       <a:hlink>
         <a:srgbClr val="0000FF"/>
@@ -4676,7 +3343,7 @@
     <a:spDef>
       <a:spPr>
         <a:solidFill>
-          <a:srgbClr val="0B0F14"/>
+          <a:srgbClr val="10064F"/>
         </a:solidFill>
         <a:ln w="25400" cap="flat">
           <a:solidFill>
@@ -4712,7 +3379,7 @@
               <a:noFill/>
             </a:ln>
             <a:solidFill>
-              <a:srgbClr val="0B0F14"/>
+              <a:srgbClr val="10064F"/>
             </a:solidFill>
             <a:effectLst/>
             <a:uFillTx/>
@@ -5283,7 +3950,7 @@
               <a:noFill/>
             </a:ln>
             <a:solidFill>
-              <a:srgbClr val="0B0F14"/>
+              <a:srgbClr val="10064F"/>
             </a:solidFill>
             <a:effectLst/>
             <a:uFillTx/>
@@ -5550,7 +4217,7 @@
         <a:srgbClr val="FFFFFF"/>
       </a:lt1>
       <a:dk2>
-        <a:srgbClr val="A7A7A7"/>
+        <a:srgbClr val="FFFFFF"/>
       </a:dk2>
       <a:lt2>
         <a:srgbClr val="535353"/>
@@ -5571,7 +4238,7 @@
         <a:srgbClr val="38BDF8"/>
       </a:accent5>
       <a:accent6>
-        <a:srgbClr val="F6C453"/>
+        <a:srgbClr val="FFFFFF"/>
       </a:accent6>
       <a:hlink>
         <a:srgbClr val="0000FF"/>
@@ -5730,7 +4397,7 @@
     <a:spDef>
       <a:spPr>
         <a:solidFill>
-          <a:srgbClr val="0B0F14"/>
+          <a:srgbClr val="10064F"/>
         </a:solidFill>
         <a:ln w="25400" cap="flat">
           <a:solidFill>
@@ -5766,7 +4433,7 @@
               <a:noFill/>
             </a:ln>
             <a:solidFill>
-              <a:srgbClr val="0B0F14"/>
+              <a:srgbClr val="10064F"/>
             </a:solidFill>
             <a:effectLst/>
             <a:uFillTx/>
@@ -6337,7 +5004,7 @@
               <a:noFill/>
             </a:ln>
             <a:solidFill>
-              <a:srgbClr val="0B0F14"/>
+              <a:srgbClr val="10064F"/>
             </a:solidFill>
             <a:effectLst/>
             <a:uFillTx/>
